--- a/PRESENTACION_SARQUE.pptx
+++ b/PRESENTACION_SARQUE.pptx
@@ -2990,37 +2990,6 @@
           <a:chExt cx="0" cy="0"/>
         </a:xfrm>
       </p:grpSpPr>
-      <p:pic>
-        <p:nvPicPr>
-          <p:cNvPr id="10" name="Imagen 9"/>
-          <p:cNvPicPr>
-            <a:picLocks noChangeAspect="1"/>
-          </p:cNvPicPr>
-          <p:nvPr/>
-        </p:nvPicPr>
-        <p:blipFill>
-          <a:blip r:embed="rId2">
-            <a:lum bright="70000" contrast="-70000"/>
-            <a:extLst>
-              <a:ext uri="{28A0092B-C50C-407E-A947-70E740481C1C}">
-                <a14:useLocalDpi xmlns:a14="http://schemas.microsoft.com/office/drawing/2010/main" val="0"/>
-              </a:ext>
-            </a:extLst>
-          </a:blip>
-          <a:stretch>
-            <a:fillRect/>
-          </a:stretch>
-        </p:blipFill>
-        <p:spPr>
-          <a:xfrm>
-            <a:off x="3626272" y="1888268"/>
-            <a:ext cx="3786310" cy="4006096"/>
-          </a:xfrm>
-          <a:prstGeom prst="rect">
-            <a:avLst/>
-          </a:prstGeom>
-        </p:spPr>
-      </p:pic>
       <p:sp>
         <p:nvSpPr>
           <p:cNvPr id="6" name="Rectángulo 5"/>
@@ -3116,8 +3085,8 @@
         </p:nvSpPr>
         <p:spPr>
           <a:xfrm>
-            <a:off x="213063" y="1533504"/>
-            <a:ext cx="3223959" cy="646331"/>
+            <a:off x="457200" y="1280160"/>
+            <a:ext cx="11277600" cy="640080"/>
           </a:xfrm>
           <a:prstGeom prst="rect">
             <a:avLst/>
@@ -3151,8 +3120,8 @@
         </p:nvSpPr>
         <p:spPr>
           <a:xfrm>
-            <a:off x="579548" y="2389900"/>
-            <a:ext cx="11011437" cy="646331"/>
+            <a:off x="548640" y="2377440"/>
+            <a:ext cx="11064240" cy="4114800"/>
           </a:xfrm>
           <a:prstGeom prst="rect">
             <a:avLst/>
@@ -3234,35 +3203,6 @@
           <a:xfrm>
             <a:off x="10802583" y="-5379"/>
             <a:ext cx="1321802" cy="1200329"/>
-          </a:xfrm>
-          <a:prstGeom prst="rect">
-            <a:avLst/>
-          </a:prstGeom>
-        </p:spPr>
-      </p:pic>
-      <p:pic>
-        <p:nvPicPr>
-          <p:cNvPr id="4" name="Imagen 3"/>
-          <p:cNvPicPr>
-            <a:picLocks noChangeAspect="1"/>
-          </p:cNvPicPr>
-          <p:nvPr/>
-        </p:nvPicPr>
-        <p:blipFill rotWithShape="1">
-          <a:blip r:embed="rId5" cstate="print">
-            <a:extLst>
-              <a:ext uri="{28A0092B-C50C-407E-A947-70E740481C1C}">
-                <a14:useLocalDpi xmlns:a14="http://schemas.microsoft.com/office/drawing/2010/main" val="0"/>
-              </a:ext>
-            </a:extLst>
-          </a:blip>
-          <a:srcRect l="29480" t="8497" r="31861" b="24248"/>
-          <a:stretch/>
-        </p:blipFill>
-        <p:spPr>
-          <a:xfrm rot="5400000">
-            <a:off x="4442503" y="2564351"/>
-            <a:ext cx="3168135" cy="4800599"/>
           </a:xfrm>
           <a:prstGeom prst="rect">
             <a:avLst/>
@@ -3299,37 +3239,6 @@
           <a:chExt cx="0" cy="0"/>
         </a:xfrm>
       </p:grpSpPr>
-      <p:pic>
-        <p:nvPicPr>
-          <p:cNvPr id="13" name="Imagen 12"/>
-          <p:cNvPicPr>
-            <a:picLocks noChangeAspect="1"/>
-          </p:cNvPicPr>
-          <p:nvPr/>
-        </p:nvPicPr>
-        <p:blipFill>
-          <a:blip r:embed="rId2">
-            <a:lum bright="70000" contrast="-70000"/>
-            <a:extLst>
-              <a:ext uri="{28A0092B-C50C-407E-A947-70E740481C1C}">
-                <a14:useLocalDpi xmlns:a14="http://schemas.microsoft.com/office/drawing/2010/main" val="0"/>
-              </a:ext>
-            </a:extLst>
-          </a:blip>
-          <a:stretch>
-            <a:fillRect/>
-          </a:stretch>
-        </p:blipFill>
-        <p:spPr>
-          <a:xfrm>
-            <a:off x="3626272" y="1788565"/>
-            <a:ext cx="3786310" cy="4006096"/>
-          </a:xfrm>
-          <a:prstGeom prst="rect">
-            <a:avLst/>
-          </a:prstGeom>
-        </p:spPr>
-      </p:pic>
       <p:sp>
         <p:nvSpPr>
           <p:cNvPr id="2" name="Rectángulo 1"/>
@@ -3422,8 +3331,8 @@
         </p:nvSpPr>
         <p:spPr>
           <a:xfrm>
-            <a:off x="109470" y="1200329"/>
-            <a:ext cx="5267459" cy="588236"/>
+            <a:off x="457200" y="1280160"/>
+            <a:ext cx="11277600" cy="640080"/>
           </a:xfrm>
           <a:prstGeom prst="rect">
             <a:avLst/>
@@ -3458,7 +3367,7 @@
             </a:lvl1pPr>
           </a:lstStyle>
           <a:p>
-            <a:pPr algn="l"/>
+            <a:pPr algn="ctr"/>
             <a:r>
               <a:rPr lang="es-BO" sz="3600" u="sng" dirty="0">
                 <a:solidFill>
@@ -3479,8 +3388,8 @@
         </p:nvSpPr>
         <p:spPr>
           <a:xfrm>
-            <a:off x="215720" y="1783186"/>
-            <a:ext cx="11908665" cy="369332"/>
+            <a:off x="548640" y="2103120"/>
+            <a:ext cx="11064240" cy="1828800"/>
           </a:xfrm>
           <a:prstGeom prst="rect">
             <a:avLst/>
@@ -3493,16 +3402,16 @@
           </a:bodyPr>
           <a:lstStyle/>
           <a:p>
-            <a:pPr lvl="0"/>
-            <a:r>
-              <a:rPr lang="es-ES" dirty="0">
+            <a:pPr lvl="0" algn="just"/>
+            <a:r>
+              <a:rPr lang="es-ES" dirty="0" sz="1300">
                 <a:latin typeface="Arial" panose="020B0604020202020204" pitchFamily="34" charset="0"/>
                 <a:cs typeface="Arial" panose="020B0604020202020204" pitchFamily="34" charset="0"/>
               </a:rPr>
               <a:t>Controlador K-Rain BL-KR: </a:t>
             </a:r>
             <a:r>
-              <a:rPr lang="es-ES" sz="1800" dirty="0">
+              <a:rPr lang="es-ES" sz="1300" dirty="0">
                 <a:effectLst/>
                 <a:latin typeface="Arial" panose="020B0604020202020204" pitchFamily="34" charset="0"/>
                 <a:cs typeface="Arial" panose="020B0604020202020204" pitchFamily="34" charset="0"/>
@@ -3531,8 +3440,8 @@
           </p:nvPr>
         </p:nvGraphicFramePr>
         <p:xfrm>
-          <a:off x="2812039" y="2713734"/>
-          <a:ext cx="7928939" cy="3861784"/>
+          <a:off x="2286000" y="4114800"/>
+          <a:ext cx="7589520" cy="2468880"/>
         </p:xfrm>
         <a:graphic>
           <a:graphicData uri="http://schemas.openxmlformats.org/drawingml/2006/table">
@@ -3613,7 +3522,7 @@
                           <a:latin typeface="Arial" panose="020B0604020202020204" pitchFamily="34" charset="0"/>
                           <a:cs typeface="Arial" panose="020B0604020202020204" pitchFamily="34" charset="0"/>
                         </a:rPr>
-                        <a:t>Arduino</a:t>
+                        <a:t>Controlador BL-KR</a:t>
                       </a:r>
                       <a:endParaRPr lang="es-BO" sz="1800" dirty="0">
                         <a:effectLst/>
@@ -3688,7 +3597,7 @@
                           <a:latin typeface="Arial" panose="020B0604020202020204" pitchFamily="34" charset="0"/>
                           <a:cs typeface="Arial" panose="020B0604020202020204" pitchFamily="34" charset="0"/>
                         </a:rPr>
-                        <a:t>Manejo de la automatización a petición al prototipo del sistema principal.</a:t>
+                        <a:t>Apertura/cierre de electroválvulas según cronograma</a:t>
                       </a:r>
                       <a:endParaRPr lang="es-BO" sz="1800" dirty="0">
                         <a:effectLst/>
@@ -3763,7 +3672,7 @@
                           <a:latin typeface="Arial" panose="020B0604020202020204" pitchFamily="34" charset="0"/>
                           <a:cs typeface="Arial" panose="020B0604020202020204" pitchFamily="34" charset="0"/>
                         </a:rPr>
-                        <a:t>Secundario </a:t>
+                        <a:t>Secundario</a:t>
                       </a:r>
                       <a:endParaRPr lang="es-BO" sz="1800" dirty="0">
                         <a:effectLst/>
@@ -3838,7 +3747,7 @@
                           <a:latin typeface="Arial" panose="020B0604020202020204" pitchFamily="34" charset="0"/>
                           <a:cs typeface="Arial" panose="020B0604020202020204" pitchFamily="34" charset="0"/>
                         </a:rPr>
-                        <a:t>Realiza acciones dependiendo a la petición del sistema</a:t>
+                        <a:t>Ejecuta el programa de riego cargado desde la app K-RainBL</a:t>
                       </a:r>
                       <a:r>
                         <a:rPr lang="es-BO" sz="1800" baseline="0" dirty="0">
@@ -3854,7 +3763,7 @@
                           <a:latin typeface="Arial" panose="020B0604020202020204" pitchFamily="34" charset="0"/>
                           <a:cs typeface="Arial" panose="020B0604020202020204" pitchFamily="34" charset="0"/>
                         </a:rPr>
-                        <a:t>el cual controla la etapa de accionamiento de</a:t>
+                        <a:t>mediante pulsos DC de polaridad invertida hacia los</a:t>
                       </a:r>
                       <a:r>
                         <a:rPr lang="es-BO" sz="1800" baseline="0" dirty="0">
@@ -3870,7 +3779,7 @@
                           <a:latin typeface="Arial" panose="020B0604020202020204" pitchFamily="34" charset="0"/>
                           <a:cs typeface="Arial" panose="020B0604020202020204" pitchFamily="34" charset="0"/>
                         </a:rPr>
-                        <a:t>los actuadores y la</a:t>
+                        <a:t>solenoides latching de las electroválvulas.</a:t>
                       </a:r>
                       <a:r>
                         <a:rPr lang="es-ES" sz="1800" baseline="0" dirty="0">
@@ -3886,7 +3795,7 @@
                           <a:latin typeface="Arial" panose="020B0604020202020204" pitchFamily="34" charset="0"/>
                           <a:cs typeface="Arial" panose="020B0604020202020204" pitchFamily="34" charset="0"/>
                         </a:rPr>
-                        <a:t>automatización de los distintos</a:t>
+                        <a:t>Opera con batería 9V durante ~1 año.</a:t>
                       </a:r>
                       <a:r>
                         <a:rPr lang="es-BO" sz="1800" baseline="0" dirty="0">
@@ -3902,7 +3811,7 @@
                           <a:latin typeface="Arial" panose="020B0604020202020204" pitchFamily="34" charset="0"/>
                           <a:cs typeface="Arial" panose="020B0604020202020204" pitchFamily="34" charset="0"/>
                         </a:rPr>
-                        <a:t>Procesos de parte del Software al Hardware.</a:t>
+                        <a:t>Comunicación BLE con smartphone del administrador.</a:t>
                       </a:r>
                       <a:endParaRPr lang="es-BO" sz="1800" dirty="0">
                         <a:effectLst/>
@@ -3984,36 +3893,6 @@
           </a:prstGeom>
         </p:spPr>
       </p:pic>
-      <p:pic>
-        <p:nvPicPr>
-          <p:cNvPr id="11" name="Imagen 10" descr="Recorte de pantalla"/>
-          <p:cNvPicPr>
-            <a:picLocks noChangeAspect="1"/>
-          </p:cNvPicPr>
-          <p:nvPr/>
-        </p:nvPicPr>
-        <p:blipFill>
-          <a:blip r:embed="rId5">
-            <a:extLst>
-              <a:ext uri="{28A0092B-C50C-407E-A947-70E740481C1C}">
-                <a14:useLocalDpi xmlns:a14="http://schemas.microsoft.com/office/drawing/2010/main" val="0"/>
-              </a:ext>
-            </a:extLst>
-          </a:blip>
-          <a:stretch>
-            <a:fillRect/>
-          </a:stretch>
-        </p:blipFill>
-        <p:spPr>
-          <a:xfrm>
-            <a:off x="981636" y="2713734"/>
-            <a:ext cx="1830404" cy="3646725"/>
-          </a:xfrm>
-          <a:prstGeom prst="rect">
-            <a:avLst/>
-          </a:prstGeom>
-        </p:spPr>
-      </p:pic>
     </p:spTree>
     <p:extLst>
       <p:ext uri="{BB962C8B-B14F-4D97-AF65-F5344CB8AC3E}">
@@ -4044,37 +3923,6 @@
           <a:chExt cx="0" cy="0"/>
         </a:xfrm>
       </p:grpSpPr>
-      <p:pic>
-        <p:nvPicPr>
-          <p:cNvPr id="10" name="Imagen 9"/>
-          <p:cNvPicPr>
-            <a:picLocks noChangeAspect="1"/>
-          </p:cNvPicPr>
-          <p:nvPr/>
-        </p:nvPicPr>
-        <p:blipFill>
-          <a:blip r:embed="rId2">
-            <a:lum bright="70000" contrast="-70000"/>
-            <a:extLst>
-              <a:ext uri="{28A0092B-C50C-407E-A947-70E740481C1C}">
-                <a14:useLocalDpi xmlns:a14="http://schemas.microsoft.com/office/drawing/2010/main" val="0"/>
-              </a:ext>
-            </a:extLst>
-          </a:blip>
-          <a:stretch>
-            <a:fillRect/>
-          </a:stretch>
-        </p:blipFill>
-        <p:spPr>
-          <a:xfrm>
-            <a:off x="3626272" y="1888268"/>
-            <a:ext cx="3786310" cy="4006096"/>
-          </a:xfrm>
-          <a:prstGeom prst="rect">
-            <a:avLst/>
-          </a:prstGeom>
-        </p:spPr>
-      </p:pic>
       <p:sp>
         <p:nvSpPr>
           <p:cNvPr id="2" name="Rectángulo 1"/>
@@ -4167,8 +4015,8 @@
         </p:nvSpPr>
         <p:spPr>
           <a:xfrm>
-            <a:off x="512618" y="1594150"/>
-            <a:ext cx="9103659" cy="588236"/>
+            <a:off x="457200" y="1280160"/>
+            <a:ext cx="11277600" cy="640080"/>
           </a:xfrm>
           <a:prstGeom prst="rect">
             <a:avLst/>
@@ -4203,7 +4051,7 @@
             </a:lvl1pPr>
           </a:lstStyle>
           <a:p>
-            <a:pPr algn="l"/>
+            <a:pPr algn="ctr"/>
             <a:r>
               <a:rPr lang="es-BO" sz="3600" u="sng" dirty="0">
                 <a:solidFill>
@@ -4284,8 +4132,8 @@
         </p:nvSpPr>
         <p:spPr>
           <a:xfrm>
-            <a:off x="1064803" y="2507938"/>
-            <a:ext cx="9676176" cy="2438135"/>
+            <a:off x="548640" y="2377440"/>
+            <a:ext cx="11064240" cy="3200400"/>
           </a:xfrm>
           <a:prstGeom prst="rect">
             <a:avLst/>
@@ -4356,37 +4204,6 @@
           <a:chExt cx="0" cy="0"/>
         </a:xfrm>
       </p:grpSpPr>
-      <p:pic>
-        <p:nvPicPr>
-          <p:cNvPr id="10" name="Imagen 9"/>
-          <p:cNvPicPr>
-            <a:picLocks noChangeAspect="1"/>
-          </p:cNvPicPr>
-          <p:nvPr/>
-        </p:nvPicPr>
-        <p:blipFill>
-          <a:blip r:embed="rId2">
-            <a:lum bright="70000" contrast="-70000"/>
-            <a:extLst>
-              <a:ext uri="{28A0092B-C50C-407E-A947-70E740481C1C}">
-                <a14:useLocalDpi xmlns:a14="http://schemas.microsoft.com/office/drawing/2010/main" val="0"/>
-              </a:ext>
-            </a:extLst>
-          </a:blip>
-          <a:stretch>
-            <a:fillRect/>
-          </a:stretch>
-        </p:blipFill>
-        <p:spPr>
-          <a:xfrm>
-            <a:off x="3626272" y="1888268"/>
-            <a:ext cx="3786310" cy="4006096"/>
-          </a:xfrm>
-          <a:prstGeom prst="rect">
-            <a:avLst/>
-          </a:prstGeom>
-        </p:spPr>
-      </p:pic>
       <p:sp>
         <p:nvSpPr>
           <p:cNvPr id="2" name="Rectángulo 1"/>
@@ -4479,8 +4296,8 @@
         </p:nvSpPr>
         <p:spPr>
           <a:xfrm>
-            <a:off x="1" y="1430992"/>
-            <a:ext cx="3181082" cy="588236"/>
+            <a:off x="457200" y="1280160"/>
+            <a:ext cx="11277600" cy="640080"/>
           </a:xfrm>
           <a:prstGeom prst="rect">
             <a:avLst/>
@@ -4515,7 +4332,7 @@
             </a:lvl1pPr>
           </a:lstStyle>
           <a:p>
-            <a:pPr algn="l"/>
+            <a:pPr algn="ctr"/>
             <a:r>
               <a:rPr lang="es-BO" sz="3600" u="sng" dirty="0">
                 <a:solidFill>
@@ -4536,8 +4353,8 @@
         </p:nvSpPr>
         <p:spPr>
           <a:xfrm>
-            <a:off x="299921" y="2019228"/>
-            <a:ext cx="6190382" cy="646331"/>
+            <a:off x="548640" y="1874519"/>
+            <a:ext cx="11064240" cy="457200"/>
           </a:xfrm>
           <a:prstGeom prst="rect">
             <a:avLst/>
@@ -4550,23 +4367,10 @@
           </a:bodyPr>
           <a:lstStyle/>
           <a:p>
-            <a:pPr algn="just"/>
-            <a:r>
-              <a:rPr lang="es-MX" dirty="0">
-                <a:latin typeface="Arial" panose="020B0604020202020204" pitchFamily="34" charset="0"/>
-                <a:cs typeface="Arial" panose="020B0604020202020204" pitchFamily="34" charset="0"/>
-              </a:rPr>
-              <a:t>Diagrama de casos de uso del Administrador (Propietaria)</a:t>
-            </a:r>
-          </a:p>
-          <a:p>
-            <a:pPr algn="just"/>
-            <a:r>
-              <a:rPr lang="es-MX" dirty="0">
-                <a:latin typeface="Arial" panose="020B0604020202020204" pitchFamily="34" charset="0"/>
-                <a:cs typeface="Arial" panose="020B0604020202020204" pitchFamily="34" charset="0"/>
-              </a:rPr>
-              <a:t>Incluye: iniciar sesión, gestionar sectores, gestionar controladores BL-KR, definir cronograma, visualizar sector activo, consultar reportes.</a:t>
+            <a:pPr algn="ctr"/>
+            <a:r>
+              <a:rPr sz="1400" b="1"/>
+              <a:t>Diagrama de Casos de Uso del Administrador (Propietaria)</a:t>
             </a:r>
           </a:p>
         </p:txBody>
@@ -4633,26 +4437,22 @@
       </p:pic>
       <p:pic>
         <p:nvPicPr>
-          <p:cNvPr id="12" name="Imagen 11"/>
-          <p:cNvPicPr/>
+          <p:cNvPr id="11" name="Picture 10" descr="CasosDeUso_SARQUE.png"/>
+          <p:cNvPicPr>
+            <a:picLocks noChangeAspect="1"/>
+          </p:cNvPicPr>
           <p:nvPr/>
         </p:nvPicPr>
         <p:blipFill>
-          <a:blip r:embed="rId5">
-            <a:extLst>
-              <a:ext uri="{28A0092B-C50C-407E-A947-70E740481C1C}">
-                <a14:useLocalDpi xmlns:a14="http://schemas.microsoft.com/office/drawing/2010/main" val="0"/>
-              </a:ext>
-            </a:extLst>
-          </a:blip>
+          <a:blip r:embed="rId6"/>
           <a:stretch>
             <a:fillRect/>
           </a:stretch>
         </p:blipFill>
         <p:spPr>
           <a:xfrm>
-            <a:off x="3203351" y="2593758"/>
-            <a:ext cx="5612130" cy="3966767"/>
+            <a:off x="2286000" y="2377440"/>
+            <a:ext cx="7589520" cy="4114800"/>
           </a:xfrm>
           <a:prstGeom prst="rect">
             <a:avLst/>
@@ -4689,37 +4489,6 @@
           <a:chExt cx="0" cy="0"/>
         </a:xfrm>
       </p:grpSpPr>
-      <p:pic>
-        <p:nvPicPr>
-          <p:cNvPr id="10" name="Imagen 9"/>
-          <p:cNvPicPr>
-            <a:picLocks noChangeAspect="1"/>
-          </p:cNvPicPr>
-          <p:nvPr/>
-        </p:nvPicPr>
-        <p:blipFill>
-          <a:blip r:embed="rId2">
-            <a:lum bright="70000" contrast="-70000"/>
-            <a:extLst>
-              <a:ext uri="{28A0092B-C50C-407E-A947-70E740481C1C}">
-                <a14:useLocalDpi xmlns:a14="http://schemas.microsoft.com/office/drawing/2010/main" val="0"/>
-              </a:ext>
-            </a:extLst>
-          </a:blip>
-          <a:stretch>
-            <a:fillRect/>
-          </a:stretch>
-        </p:blipFill>
-        <p:spPr>
-          <a:xfrm>
-            <a:off x="3626272" y="1888268"/>
-            <a:ext cx="3786310" cy="4006096"/>
-          </a:xfrm>
-          <a:prstGeom prst="rect">
-            <a:avLst/>
-          </a:prstGeom>
-        </p:spPr>
-      </p:pic>
       <p:sp>
         <p:nvSpPr>
           <p:cNvPr id="2" name="Rectángulo 1"/>
@@ -4812,8 +4581,8 @@
         </p:nvSpPr>
         <p:spPr>
           <a:xfrm>
-            <a:off x="1" y="1430992"/>
-            <a:ext cx="3181082" cy="588236"/>
+            <a:off x="457200" y="1280160"/>
+            <a:ext cx="11277600" cy="640080"/>
           </a:xfrm>
           <a:prstGeom prst="rect">
             <a:avLst/>
@@ -4848,7 +4617,7 @@
             </a:lvl1pPr>
           </a:lstStyle>
           <a:p>
-            <a:pPr algn="l"/>
+            <a:pPr algn="ctr"/>
             <a:r>
               <a:rPr lang="es-BO" sz="3600" u="sng" dirty="0">
                 <a:solidFill>
@@ -4869,8 +4638,8 @@
         </p:nvSpPr>
         <p:spPr>
           <a:xfrm>
-            <a:off x="412124" y="2150772"/>
-            <a:ext cx="7266147" cy="369332"/>
+            <a:off x="548640" y="1874519"/>
+            <a:ext cx="11064240" cy="457200"/>
           </a:xfrm>
           <a:prstGeom prst="rect">
             <a:avLst/>
@@ -4883,13 +4652,10 @@
           </a:bodyPr>
           <a:lstStyle/>
           <a:p>
-            <a:pPr algn="just"/>
-            <a:r>
-              <a:rPr lang="es-MX" dirty="0">
-                <a:latin typeface="Arial" panose="020B0604020202020204" pitchFamily="34" charset="0"/>
-                <a:cs typeface="Arial" panose="020B0604020202020204" pitchFamily="34" charset="0"/>
-              </a:rPr>
-              <a:t>Diagrama de casos de uso del Operador (Jardinero). Incluye: consultar cronograma semanal, visualizar sector siendo regado en tiempo real, consultar reportes de consumo simulado.</a:t>
+            <a:pPr algn="ctr"/>
+            <a:r>
+              <a:rPr sz="1400" b="1"/>
+              <a:t>Diagrama de Casos de Uso del Operador (Jardinero)</a:t>
             </a:r>
           </a:p>
         </p:txBody>
@@ -4956,26 +4722,22 @@
       </p:pic>
       <p:pic>
         <p:nvPicPr>
-          <p:cNvPr id="11" name="Imagen 10"/>
-          <p:cNvPicPr/>
+          <p:cNvPr id="11" name="Picture 10" descr="CasosDeUso_SARQUE.png"/>
+          <p:cNvPicPr>
+            <a:picLocks noChangeAspect="1"/>
+          </p:cNvPicPr>
           <p:nvPr/>
         </p:nvPicPr>
         <p:blipFill>
-          <a:blip r:embed="rId5">
-            <a:extLst>
-              <a:ext uri="{28A0092B-C50C-407E-A947-70E740481C1C}">
-                <a14:useLocalDpi xmlns:a14="http://schemas.microsoft.com/office/drawing/2010/main" val="0"/>
-              </a:ext>
-            </a:extLst>
-          </a:blip>
+          <a:blip r:embed="rId6"/>
           <a:stretch>
             <a:fillRect/>
           </a:stretch>
         </p:blipFill>
         <p:spPr>
           <a:xfrm>
-            <a:off x="2770109" y="2782608"/>
-            <a:ext cx="6306671" cy="3653656"/>
+            <a:off x="2286000" y="2377440"/>
+            <a:ext cx="7589520" cy="4114800"/>
           </a:xfrm>
           <a:prstGeom prst="rect">
             <a:avLst/>
@@ -5012,37 +4774,6 @@
           <a:chExt cx="0" cy="0"/>
         </a:xfrm>
       </p:grpSpPr>
-      <p:pic>
-        <p:nvPicPr>
-          <p:cNvPr id="10" name="Imagen 9"/>
-          <p:cNvPicPr>
-            <a:picLocks noChangeAspect="1"/>
-          </p:cNvPicPr>
-          <p:nvPr/>
-        </p:nvPicPr>
-        <p:blipFill>
-          <a:blip r:embed="rId2">
-            <a:lum bright="70000" contrast="-70000"/>
-            <a:extLst>
-              <a:ext uri="{28A0092B-C50C-407E-A947-70E740481C1C}">
-                <a14:useLocalDpi xmlns:a14="http://schemas.microsoft.com/office/drawing/2010/main" val="0"/>
-              </a:ext>
-            </a:extLst>
-          </a:blip>
-          <a:stretch>
-            <a:fillRect/>
-          </a:stretch>
-        </p:blipFill>
-        <p:spPr>
-          <a:xfrm>
-            <a:off x="3626272" y="1888268"/>
-            <a:ext cx="3786310" cy="4006096"/>
-          </a:xfrm>
-          <a:prstGeom prst="rect">
-            <a:avLst/>
-          </a:prstGeom>
-        </p:spPr>
-      </p:pic>
       <p:sp>
         <p:nvSpPr>
           <p:cNvPr id="2" name="Rectángulo 1"/>
@@ -5135,8 +4866,8 @@
         </p:nvSpPr>
         <p:spPr>
           <a:xfrm>
-            <a:off x="412124" y="1381432"/>
-            <a:ext cx="5430981" cy="588236"/>
+            <a:off x="457200" y="1280160"/>
+            <a:ext cx="11277600" cy="640080"/>
           </a:xfrm>
           <a:prstGeom prst="rect">
             <a:avLst/>
@@ -5171,7 +4902,7 @@
             </a:lvl1pPr>
           </a:lstStyle>
           <a:p>
-            <a:pPr algn="l"/>
+            <a:pPr algn="ctr"/>
             <a:r>
               <a:rPr lang="es-BO" sz="3600" u="sng" dirty="0">
                 <a:solidFill>
@@ -5192,8 +4923,8 @@
         </p:nvSpPr>
         <p:spPr>
           <a:xfrm>
-            <a:off x="412124" y="2012861"/>
-            <a:ext cx="10390458" cy="1200329"/>
+            <a:off x="548640" y="1874519"/>
+            <a:ext cx="11064240" cy="457200"/>
           </a:xfrm>
           <a:prstGeom prst="rect">
             <a:avLst/>
@@ -5206,31 +4937,10 @@
           </a:bodyPr>
           <a:lstStyle/>
           <a:p>
-            <a:pPr algn="just"/>
-            <a:r>
-              <a:rPr lang="es-BO" sz="1800" dirty="0">
-                <a:effectLst/>
-                <a:latin typeface="Arial" panose="020B0604020202020204" pitchFamily="34" charset="0"/>
-                <a:ea typeface="Calibri" panose="020F0502020204030204" pitchFamily="34" charset="0"/>
-                <a:cs typeface="Times New Roman" panose="02020603050405020304" pitchFamily="18" charset="0"/>
-              </a:rPr>
-              <a:t>El diagrama de clases (Modelo Entidad-Relación) de SARQUE incluye las tablas principales de la base de datos en Supabase/PostgreSQL: sectores (catálogo de zonas del parque con duración y color), horarios_riego (cronograma semanal por sector, día y hora). Las relaciones se gestionan mediante claves foráneas con políticas de Row Level Security (RLS) públicas para acceso sin autenticación.</a:t>
-            </a:r>
-            <a:endParaRPr lang="es-ES" sz="1800" dirty="0">
-              <a:effectLst/>
-              <a:latin typeface="Calibri" panose="020F0502020204030204" pitchFamily="34" charset="0"/>
-              <a:ea typeface="Calibri" panose="020F0502020204030204" pitchFamily="34" charset="0"/>
-              <a:cs typeface="Times New Roman" panose="02020603050405020304" pitchFamily="18" charset="0"/>
-            </a:endParaRPr>
-          </a:p>
-          <a:p>
-            <a:pPr algn="just"/>
-            <a:r>
-              <a:rPr lang="es-MX" dirty="0">
-                <a:latin typeface="Arial" panose="020B0604020202020204" pitchFamily="34" charset="0"/>
-                <a:cs typeface="Arial" panose="020B0604020202020204" pitchFamily="34" charset="0"/>
-              </a:rPr>
-              <a:t> . </a:t>
+            <a:pPr algn="ctr"/>
+            <a:r>
+              <a:rPr sz="1300" b="1"/>
+              <a:t>Modelo Entidad-Relación de la Base de Datos SARQUE en PostgreSQL/Supabase</a:t>
             </a:r>
           </a:p>
         </p:txBody>
@@ -5297,28 +5007,22 @@
       </p:pic>
       <p:pic>
         <p:nvPicPr>
-          <p:cNvPr id="6" name="Imagen 5">
-            <a:extLst>
-              <a:ext uri="{FF2B5EF4-FFF2-40B4-BE49-F238E27FC236}">
-                <a16:creationId xmlns:a16="http://schemas.microsoft.com/office/drawing/2014/main" id="{19F7904B-6766-42FB-B267-532CD13FE8B4}"/>
-              </a:ext>
-            </a:extLst>
-          </p:cNvPr>
+          <p:cNvPr id="11" name="Picture 10" descr="ClasesBD_SARQUE.png"/>
           <p:cNvPicPr>
             <a:picLocks noChangeAspect="1"/>
           </p:cNvPicPr>
           <p:nvPr/>
         </p:nvPicPr>
         <p:blipFill>
-          <a:blip r:embed="rId5"/>
+          <a:blip r:embed="rId6"/>
           <a:stretch>
             <a:fillRect/>
           </a:stretch>
         </p:blipFill>
         <p:spPr>
           <a:xfrm>
-            <a:off x="2127131" y="3337782"/>
-            <a:ext cx="6949649" cy="3063418"/>
+            <a:off x="1828800" y="2377440"/>
+            <a:ext cx="8503920" cy="4114800"/>
           </a:xfrm>
           <a:prstGeom prst="rect">
             <a:avLst/>
@@ -5355,37 +5059,6 @@
           <a:chExt cx="0" cy="0"/>
         </a:xfrm>
       </p:grpSpPr>
-      <p:pic>
-        <p:nvPicPr>
-          <p:cNvPr id="9" name="Imagen 8"/>
-          <p:cNvPicPr>
-            <a:picLocks noChangeAspect="1"/>
-          </p:cNvPicPr>
-          <p:nvPr/>
-        </p:nvPicPr>
-        <p:blipFill>
-          <a:blip r:embed="rId2">
-            <a:lum bright="70000" contrast="-70000"/>
-            <a:extLst>
-              <a:ext uri="{28A0092B-C50C-407E-A947-70E740481C1C}">
-                <a14:useLocalDpi xmlns:a14="http://schemas.microsoft.com/office/drawing/2010/main" val="0"/>
-              </a:ext>
-            </a:extLst>
-          </a:blip>
-          <a:stretch>
-            <a:fillRect/>
-          </a:stretch>
-        </p:blipFill>
-        <p:spPr>
-          <a:xfrm>
-            <a:off x="3626272" y="1888268"/>
-            <a:ext cx="3786310" cy="4006096"/>
-          </a:xfrm>
-          <a:prstGeom prst="rect">
-            <a:avLst/>
-          </a:prstGeom>
-        </p:spPr>
-      </p:pic>
       <p:sp>
         <p:nvSpPr>
           <p:cNvPr id="2" name="Rectángulo 1"/>
@@ -5478,8 +5151,8 @@
         </p:nvSpPr>
         <p:spPr>
           <a:xfrm>
-            <a:off x="354999" y="1482507"/>
-            <a:ext cx="5164428" cy="588236"/>
+            <a:off x="457200" y="1280160"/>
+            <a:ext cx="11277600" cy="640080"/>
           </a:xfrm>
           <a:prstGeom prst="rect">
             <a:avLst/>
@@ -5514,7 +5187,7 @@
             </a:lvl1pPr>
           </a:lstStyle>
           <a:p>
-            <a:pPr algn="l"/>
+            <a:pPr algn="ctr"/>
             <a:r>
               <a:rPr lang="es-BO" sz="3600" u="sng" dirty="0">
                 <a:solidFill>
@@ -5527,34 +5200,6 @@
           </a:p>
         </p:txBody>
       </p:sp>
-      <p:pic>
-        <p:nvPicPr>
-          <p:cNvPr id="5" name="Imagen 4"/>
-          <p:cNvPicPr/>
-          <p:nvPr/>
-        </p:nvPicPr>
-        <p:blipFill>
-          <a:blip r:embed="rId3">
-            <a:extLst>
-              <a:ext uri="{28A0092B-C50C-407E-A947-70E740481C1C}">
-                <a14:useLocalDpi xmlns:a14="http://schemas.microsoft.com/office/drawing/2010/main" val="0"/>
-              </a:ext>
-            </a:extLst>
-          </a:blip>
-          <a:stretch>
-            <a:fillRect/>
-          </a:stretch>
-        </p:blipFill>
-        <p:spPr>
-          <a:xfrm>
-            <a:off x="874058" y="2070743"/>
-            <a:ext cx="7675808" cy="4600513"/>
-          </a:xfrm>
-          <a:prstGeom prst="rect">
-            <a:avLst/>
-          </a:prstGeom>
-        </p:spPr>
-      </p:pic>
       <p:pic>
         <p:nvPicPr>
           <p:cNvPr id="6" name="Imagen 5"/>
@@ -5609,6 +5254,30 @@
           <a:xfrm>
             <a:off x="10802583" y="-5379"/>
             <a:ext cx="1321802" cy="1200329"/>
+          </a:xfrm>
+          <a:prstGeom prst="rect">
+            <a:avLst/>
+          </a:prstGeom>
+        </p:spPr>
+      </p:pic>
+      <p:pic>
+        <p:nvPicPr>
+          <p:cNvPr id="10" name="Picture 9" descr="Arquitectura_SARQUE.png"/>
+          <p:cNvPicPr>
+            <a:picLocks noChangeAspect="1"/>
+          </p:cNvPicPr>
+          <p:nvPr/>
+        </p:nvPicPr>
+        <p:blipFill>
+          <a:blip r:embed="rId6"/>
+          <a:stretch>
+            <a:fillRect/>
+          </a:stretch>
+        </p:blipFill>
+        <p:spPr>
+          <a:xfrm>
+            <a:off x="1371600" y="2194560"/>
+            <a:ext cx="9418320" cy="4389120"/>
           </a:xfrm>
           <a:prstGeom prst="rect">
             <a:avLst/>
@@ -5797,8 +5466,8 @@
         </p:nvSpPr>
         <p:spPr>
           <a:xfrm>
-            <a:off x="313878" y="1468746"/>
-            <a:ext cx="10488705" cy="588236"/>
+            <a:off x="457200" y="1280160"/>
+            <a:ext cx="11277600" cy="640080"/>
           </a:xfrm>
           <a:prstGeom prst="rect">
             <a:avLst/>
@@ -5833,7 +5502,7 @@
             </a:lvl1pPr>
           </a:lstStyle>
           <a:p>
-            <a:pPr algn="l"/>
+            <a:pPr algn="ctr"/>
             <a:r>
               <a:rPr lang="es-BO" sz="3600" u="sng" dirty="0">
                 <a:solidFill>
@@ -5848,28 +5517,22 @@
       </p:sp>
       <p:pic>
         <p:nvPicPr>
-          <p:cNvPr id="8" name="Imagen 7"/>
+          <p:cNvPr id="8" name="Picture 7" descr="Componentes_SARQUE.png"/>
           <p:cNvPicPr>
             <a:picLocks noChangeAspect="1"/>
           </p:cNvPicPr>
           <p:nvPr/>
         </p:nvPicPr>
         <p:blipFill>
-          <a:blip r:embed="rId4" cstate="print">
-            <a:extLst>
-              <a:ext uri="{28A0092B-C50C-407E-A947-70E740481C1C}">
-                <a14:useLocalDpi xmlns:a14="http://schemas.microsoft.com/office/drawing/2010/main" val="0"/>
-              </a:ext>
-            </a:extLst>
-          </a:blip>
+          <a:blip r:embed="rId5"/>
           <a:stretch>
             <a:fillRect/>
           </a:stretch>
         </p:blipFill>
         <p:spPr>
-          <a:xfrm rot="5400000">
-            <a:off x="2890908" y="1325427"/>
-            <a:ext cx="4706888" cy="6169998"/>
+          <a:xfrm>
+            <a:off x="1371600" y="2103120"/>
+            <a:ext cx="9418320" cy="4480560"/>
           </a:xfrm>
           <a:prstGeom prst="rect">
             <a:avLst/>
@@ -6058,8 +5721,8 @@
         </p:nvSpPr>
         <p:spPr>
           <a:xfrm>
-            <a:off x="235528" y="1482507"/>
-            <a:ext cx="7476564" cy="588236"/>
+            <a:off x="457200" y="1280160"/>
+            <a:ext cx="11277600" cy="640080"/>
           </a:xfrm>
           <a:prstGeom prst="rect">
             <a:avLst/>
@@ -6094,7 +5757,7 @@
             </a:lvl1pPr>
           </a:lstStyle>
           <a:p>
-            <a:pPr algn="l"/>
+            <a:pPr algn="ctr"/>
             <a:r>
               <a:rPr lang="es-BO" sz="3600" u="sng" dirty="0">
                 <a:solidFill>
@@ -6109,58 +5772,22 @@
       </p:sp>
       <p:pic>
         <p:nvPicPr>
-          <p:cNvPr id="8" name="Imagen 7" descr="Recorte de pantalla"/>
+          <p:cNvPr id="8" name="Picture 7" descr="Bomba_specs.png"/>
           <p:cNvPicPr>
             <a:picLocks noChangeAspect="1"/>
           </p:cNvPicPr>
           <p:nvPr/>
         </p:nvPicPr>
         <p:blipFill>
-          <a:blip r:embed="rId4">
-            <a:extLst>
-              <a:ext uri="{28A0092B-C50C-407E-A947-70E740481C1C}">
-                <a14:useLocalDpi xmlns:a14="http://schemas.microsoft.com/office/drawing/2010/main" val="0"/>
-              </a:ext>
-            </a:extLst>
-          </a:blip>
+          <a:blip r:embed="rId6"/>
           <a:stretch>
             <a:fillRect/>
           </a:stretch>
         </p:blipFill>
         <p:spPr>
           <a:xfrm>
-            <a:off x="613471" y="2448912"/>
-            <a:ext cx="4982270" cy="2791215"/>
-          </a:xfrm>
-          <a:prstGeom prst="rect">
-            <a:avLst/>
-          </a:prstGeom>
-        </p:spPr>
-      </p:pic>
-      <p:pic>
-        <p:nvPicPr>
-          <p:cNvPr id="9" name="Imagen 8"/>
-          <p:cNvPicPr>
-            <a:picLocks noChangeAspect="1"/>
-          </p:cNvPicPr>
-          <p:nvPr/>
-        </p:nvPicPr>
-        <p:blipFill>
-          <a:blip r:embed="rId5">
-            <a:extLst>
-              <a:ext uri="{28A0092B-C50C-407E-A947-70E740481C1C}">
-                <a14:useLocalDpi xmlns:a14="http://schemas.microsoft.com/office/drawing/2010/main" val="0"/>
-              </a:ext>
-            </a:extLst>
-          </a:blip>
-          <a:stretch>
-            <a:fillRect/>
-          </a:stretch>
-        </p:blipFill>
-        <p:spPr>
-          <a:xfrm>
-            <a:off x="6006465" y="2070743"/>
-            <a:ext cx="4567971" cy="2822394"/>
+            <a:off x="2209800" y="2011680"/>
+            <a:ext cx="7772400" cy="4572000"/>
           </a:xfrm>
           <a:prstGeom prst="rect">
             <a:avLst/>
@@ -6349,8 +5976,8 @@
         </p:nvSpPr>
         <p:spPr>
           <a:xfrm>
-            <a:off x="235529" y="1488095"/>
-            <a:ext cx="8164285" cy="588236"/>
+            <a:off x="457200" y="1280160"/>
+            <a:ext cx="11277600" cy="640080"/>
           </a:xfrm>
           <a:prstGeom prst="rect">
             <a:avLst/>
@@ -6385,7 +6012,7 @@
             </a:lvl1pPr>
           </a:lstStyle>
           <a:p>
-            <a:pPr algn="l"/>
+            <a:pPr algn="ctr"/>
             <a:r>
               <a:rPr lang="es-BO" sz="3600" u="sng" dirty="0">
                 <a:solidFill>
@@ -6400,57 +6027,22 @@
       </p:sp>
       <p:pic>
         <p:nvPicPr>
-          <p:cNvPr id="10" name="Imagen 9"/>
-          <p:cNvPicPr>
-            <a:picLocks noChangeAspect="1"/>
-          </p:cNvPicPr>
-          <p:nvPr/>
-        </p:nvPicPr>
-        <p:blipFill rotWithShape="1">
-          <a:blip r:embed="rId4">
-            <a:extLst>
-              <a:ext uri="{28A0092B-C50C-407E-A947-70E740481C1C}">
-                <a14:useLocalDpi xmlns:a14="http://schemas.microsoft.com/office/drawing/2010/main" val="0"/>
-              </a:ext>
-            </a:extLst>
-          </a:blip>
-          <a:srcRect l="7885" t="3054" r="6401" b="1353"/>
-          <a:stretch/>
-        </p:blipFill>
-        <p:spPr>
-          <a:xfrm>
-            <a:off x="7193099" y="2603607"/>
-            <a:ext cx="4367519" cy="2873828"/>
-          </a:xfrm>
-          <a:prstGeom prst="rect">
-            <a:avLst/>
-          </a:prstGeom>
-        </p:spPr>
-      </p:pic>
-      <p:pic>
-        <p:nvPicPr>
-          <p:cNvPr id="11" name="Imagen 10" descr="Recorte de pantalla"/>
+          <p:cNvPr id="8" name="Picture 7" descr="BLKR_specs.png"/>
           <p:cNvPicPr>
             <a:picLocks noChangeAspect="1"/>
           </p:cNvPicPr>
           <p:nvPr/>
         </p:nvPicPr>
         <p:blipFill>
-          <a:blip r:embed="rId5">
-            <a:extLst>
-              <a:ext uri="{28A0092B-C50C-407E-A947-70E740481C1C}">
-                <a14:useLocalDpi xmlns:a14="http://schemas.microsoft.com/office/drawing/2010/main" val="0"/>
-              </a:ext>
-            </a:extLst>
-          </a:blip>
+          <a:blip r:embed="rId6"/>
           <a:stretch>
             <a:fillRect/>
           </a:stretch>
         </p:blipFill>
         <p:spPr>
           <a:xfrm>
-            <a:off x="542899" y="2152531"/>
-            <a:ext cx="6220693" cy="4058216"/>
+            <a:off x="2209800" y="2011680"/>
+            <a:ext cx="7772400" cy="4572000"/>
           </a:xfrm>
           <a:prstGeom prst="rect">
             <a:avLst/>
@@ -6639,8 +6231,8 @@
         </p:nvSpPr>
         <p:spPr>
           <a:xfrm>
-            <a:off x="290945" y="1509401"/>
-            <a:ext cx="8164285" cy="588236"/>
+            <a:off x="457200" y="1280160"/>
+            <a:ext cx="11277600" cy="640080"/>
           </a:xfrm>
           <a:prstGeom prst="rect">
             <a:avLst/>
@@ -6675,7 +6267,7 @@
             </a:lvl1pPr>
           </a:lstStyle>
           <a:p>
-            <a:pPr algn="l"/>
+            <a:pPr algn="ctr"/>
             <a:r>
               <a:rPr lang="es-BO" sz="3600" dirty="0">
                 <a:solidFill>
@@ -6690,1288 +6282,1549 @@
       </p:sp>
       <p:graphicFrame>
         <p:nvGraphicFramePr>
-          <p:cNvPr id="6" name="Tabla 5"/>
+          <p:cNvPr id="8" name="Table 7"/>
           <p:cNvGraphicFramePr>
             <a:graphicFrameLocks noGrp="1"/>
           </p:cNvGraphicFramePr>
-          <p:nvPr>
-            <p:extLst>
-              <p:ext uri="{D42A27DB-BD31-4B8C-83A1-F6EECF244321}">
-                <p14:modId xmlns:p14="http://schemas.microsoft.com/office/powerpoint/2010/main" val="2237204555"/>
-              </p:ext>
-            </p:extLst>
-          </p:nvPr>
+          <p:nvPr/>
         </p:nvGraphicFramePr>
         <p:xfrm>
-          <a:off x="2353235" y="2097637"/>
-          <a:ext cx="6857999" cy="4412090"/>
+          <a:off x="457200" y="2011680"/>
+          <a:ext cx="11247120" cy="4480560"/>
         </p:xfrm>
         <a:graphic>
           <a:graphicData uri="http://schemas.openxmlformats.org/drawingml/2006/table">
             <a:tbl>
-              <a:tblPr firstRow="1" firstCol="1" bandRow="1">
+              <a:tblPr firstRow="1" bandRow="1">
                 <a:tableStyleId>{5C22544A-7EE6-4342-B048-85BDC9FD1C3A}</a:tableStyleId>
               </a:tblPr>
               <a:tblGrid>
-                <a:gridCol w="1714499">
-                  <a:extLst>
-                    <a:ext uri="{9D8B030D-6E8A-4147-A177-3AD203B41FA5}">
-                      <a16:colId xmlns:a16="http://schemas.microsoft.com/office/drawing/2014/main" val="20000"/>
-                    </a:ext>
-                  </a:extLst>
-                </a:gridCol>
-                <a:gridCol w="2906958">
-                  <a:extLst>
-                    <a:ext uri="{9D8B030D-6E8A-4147-A177-3AD203B41FA5}">
-                      <a16:colId xmlns:a16="http://schemas.microsoft.com/office/drawing/2014/main" val="20001"/>
-                    </a:ext>
-                  </a:extLst>
-                </a:gridCol>
-                <a:gridCol w="1211104">
-                  <a:extLst>
-                    <a:ext uri="{9D8B030D-6E8A-4147-A177-3AD203B41FA5}">
-                      <a16:colId xmlns:a16="http://schemas.microsoft.com/office/drawing/2014/main" val="20002"/>
-                    </a:ext>
-                  </a:extLst>
-                </a:gridCol>
-                <a:gridCol w="1025438">
-                  <a:extLst>
-                    <a:ext uri="{9D8B030D-6E8A-4147-A177-3AD203B41FA5}">
-                      <a16:colId xmlns:a16="http://schemas.microsoft.com/office/drawing/2014/main" val="20003"/>
-                    </a:ext>
-                  </a:extLst>
-                </a:gridCol>
+                <a:gridCol w="548640"/>
+                <a:gridCol w="1097280"/>
+                <a:gridCol w="6858000"/>
+                <a:gridCol w="1371600"/>
+                <a:gridCol w="1371600"/>
               </a:tblGrid>
-              <a:tr h="467321">
+              <a:tr h="344658">
                 <a:tc>
                   <a:txBody>
                     <a:bodyPr/>
                     <a:lstStyle/>
                     <a:p>
-                      <a:pPr algn="ctr">
-                        <a:lnSpc>
-                          <a:spcPct val="150000"/>
-                        </a:lnSpc>
-                        <a:spcAft>
-                          <a:spcPts val="0"/>
-                        </a:spcAft>
-                      </a:pPr>
+                      <a:pPr algn="ctr"/>
                       <a:r>
-                        <a:rPr lang="es-BO" sz="1200" dirty="0">
-                          <a:effectLst/>
-                          <a:latin typeface="Arial" panose="020B0604020202020204" pitchFamily="34" charset="0"/>
-                          <a:cs typeface="Arial" panose="020B0604020202020204" pitchFamily="34" charset="0"/>
+                        <a:rPr sz="1300" b="1">
+                          <a:solidFill>
+                            <a:srgbClr val="FFFFFF"/>
+                          </a:solidFill>
+                          <a:latin typeface="Calibri"/>
                         </a:rPr>
-                        <a:t>CANTIDAD</a:t>
+                        <a:t>N°</a:t>
                       </a:r>
-                      <a:endParaRPr lang="es-BO" sz="1200" dirty="0">
-                        <a:effectLst/>
-                        <a:latin typeface="Arial" panose="020B0604020202020204" pitchFamily="34" charset="0"/>
-                        <a:ea typeface="Calibri" panose="020F0502020204030204" pitchFamily="34" charset="0"/>
-                        <a:cs typeface="Arial" panose="020B0604020202020204" pitchFamily="34" charset="0"/>
-                      </a:endParaRPr>
                     </a:p>
                   </a:txBody>
-                  <a:tcPr marL="57254" marR="57254" marT="0" marB="0" anchor="ctr"/>
+                  <a:tcPr>
+                    <a:solidFill>
+                      <a:srgbClr val="1565C0"/>
+                    </a:solidFill>
+                  </a:tcPr>
                 </a:tc>
                 <a:tc>
                   <a:txBody>
                     <a:bodyPr/>
                     <a:lstStyle/>
                     <a:p>
-                      <a:pPr algn="ctr">
-                        <a:lnSpc>
-                          <a:spcPct val="150000"/>
-                        </a:lnSpc>
-                        <a:spcAft>
-                          <a:spcPts val="0"/>
-                        </a:spcAft>
-                      </a:pPr>
+                      <a:pPr algn="ctr"/>
                       <a:r>
-                        <a:rPr lang="es-BO" sz="1200" dirty="0">
-                          <a:effectLst/>
-                          <a:latin typeface="Arial" panose="020B0604020202020204" pitchFamily="34" charset="0"/>
-                          <a:cs typeface="Arial" panose="020B0604020202020204" pitchFamily="34" charset="0"/>
+                        <a:rPr sz="1300" b="1">
+                          <a:solidFill>
+                            <a:srgbClr val="FFFFFF"/>
+                          </a:solidFill>
+                          <a:latin typeface="Calibri"/>
                         </a:rPr>
-                        <a:t>DESCRIPCION</a:t>
+                        <a:t>Cantidad</a:t>
                       </a:r>
-                      <a:endParaRPr lang="es-BO" sz="1200" dirty="0">
-                        <a:effectLst/>
-                        <a:latin typeface="Arial" panose="020B0604020202020204" pitchFamily="34" charset="0"/>
-                        <a:ea typeface="Calibri" panose="020F0502020204030204" pitchFamily="34" charset="0"/>
-                        <a:cs typeface="Arial" panose="020B0604020202020204" pitchFamily="34" charset="0"/>
-                      </a:endParaRPr>
                     </a:p>
                   </a:txBody>
-                  <a:tcPr marL="57254" marR="57254" marT="0" marB="0" anchor="ctr"/>
+                  <a:tcPr>
+                    <a:solidFill>
+                      <a:srgbClr val="1565C0"/>
+                    </a:solidFill>
+                  </a:tcPr>
                 </a:tc>
                 <a:tc>
                   <a:txBody>
                     <a:bodyPr/>
                     <a:lstStyle/>
                     <a:p>
-                      <a:pPr algn="ctr">
-                        <a:lnSpc>
-                          <a:spcPct val="150000"/>
-                        </a:lnSpc>
-                        <a:spcAft>
-                          <a:spcPts val="0"/>
-                        </a:spcAft>
-                      </a:pPr>
+                      <a:pPr algn="ctr"/>
                       <a:r>
-                        <a:rPr lang="es-BO" sz="1200">
-                          <a:effectLst/>
-                          <a:latin typeface="Arial" panose="020B0604020202020204" pitchFamily="34" charset="0"/>
-                          <a:cs typeface="Arial" panose="020B0604020202020204" pitchFamily="34" charset="0"/>
+                        <a:rPr sz="1300" b="1">
+                          <a:solidFill>
+                            <a:srgbClr val="FFFFFF"/>
+                          </a:solidFill>
+                          <a:latin typeface="Calibri"/>
                         </a:rPr>
-                        <a:t>PRECIO</a:t>
+                        <a:t>Descripción</a:t>
                       </a:r>
                     </a:p>
-                    <a:p>
-                      <a:pPr algn="ctr">
-                        <a:lnSpc>
-                          <a:spcPct val="150000"/>
-                        </a:lnSpc>
-                        <a:spcAft>
-                          <a:spcPts val="0"/>
-                        </a:spcAft>
-                      </a:pPr>
-                      <a:r>
-                        <a:rPr lang="es-BO" sz="1200">
-                          <a:effectLst/>
-                          <a:latin typeface="Arial" panose="020B0604020202020204" pitchFamily="34" charset="0"/>
-                          <a:cs typeface="Arial" panose="020B0604020202020204" pitchFamily="34" charset="0"/>
-                        </a:rPr>
-                        <a:t>UNITARIO</a:t>
-                      </a:r>
-                      <a:endParaRPr lang="es-BO" sz="1200">
-                        <a:effectLst/>
-                        <a:latin typeface="Arial" panose="020B0604020202020204" pitchFamily="34" charset="0"/>
-                        <a:ea typeface="Calibri" panose="020F0502020204030204" pitchFamily="34" charset="0"/>
-                        <a:cs typeface="Arial" panose="020B0604020202020204" pitchFamily="34" charset="0"/>
-                      </a:endParaRPr>
-                    </a:p>
                   </a:txBody>
-                  <a:tcPr marL="57254" marR="57254" marT="0" marB="0" anchor="ctr"/>
+                  <a:tcPr>
+                    <a:solidFill>
+                      <a:srgbClr val="1565C0"/>
+                    </a:solidFill>
+                  </a:tcPr>
                 </a:tc>
                 <a:tc>
                   <a:txBody>
                     <a:bodyPr/>
                     <a:lstStyle/>
                     <a:p>
-                      <a:pPr algn="ctr">
-                        <a:lnSpc>
-                          <a:spcPct val="150000"/>
-                        </a:lnSpc>
-                        <a:spcAft>
-                          <a:spcPts val="0"/>
-                        </a:spcAft>
-                      </a:pPr>
+                      <a:pPr algn="ctr"/>
                       <a:r>
-                        <a:rPr lang="es-BO" sz="1200" dirty="0">
-                          <a:effectLst/>
-                          <a:latin typeface="Arial" panose="020B0604020202020204" pitchFamily="34" charset="0"/>
-                          <a:cs typeface="Arial" panose="020B0604020202020204" pitchFamily="34" charset="0"/>
+                        <a:rPr sz="1300" b="1">
+                          <a:solidFill>
+                            <a:srgbClr val="FFFFFF"/>
+                          </a:solidFill>
+                          <a:latin typeface="Calibri"/>
                         </a:rPr>
-                        <a:t>MONTO (Bs.)</a:t>
+                        <a:t>P. Unit. (Bs)</a:t>
                       </a:r>
-                      <a:endParaRPr lang="es-BO" sz="1200" dirty="0">
-                        <a:effectLst/>
-                        <a:latin typeface="Arial" panose="020B0604020202020204" pitchFamily="34" charset="0"/>
-                        <a:ea typeface="Calibri" panose="020F0502020204030204" pitchFamily="34" charset="0"/>
-                        <a:cs typeface="Arial" panose="020B0604020202020204" pitchFamily="34" charset="0"/>
-                      </a:endParaRPr>
                     </a:p>
                   </a:txBody>
-                  <a:tcPr marL="57254" marR="57254" marT="0" marB="0" anchor="ctr"/>
-                </a:tc>
-                <a:extLst>
-                  <a:ext uri="{0D108BD9-81ED-4DB2-BD59-A6C34878D82A}">
-                    <a16:rowId xmlns:a16="http://schemas.microsoft.com/office/drawing/2014/main" val="10000"/>
-                  </a:ext>
-                </a:extLst>
-              </a:tr>
-              <a:tr h="467321">
-                <a:tc>
-                  <a:txBody>
-                    <a:bodyPr/>
-                    <a:lstStyle/>
-                    <a:p>
-                      <a:pPr algn="just">
-                        <a:lnSpc>
-                          <a:spcPct val="150000"/>
-                        </a:lnSpc>
-                        <a:spcAft>
-                          <a:spcPts val="0"/>
-                        </a:spcAft>
-                      </a:pPr>
-                      <a:r>
-                        <a:rPr lang="es-BO" sz="1200">
-                          <a:effectLst/>
-                          <a:latin typeface="Arial" panose="020B0604020202020204" pitchFamily="34" charset="0"/>
-                          <a:cs typeface="Arial" panose="020B0604020202020204" pitchFamily="34" charset="0"/>
-                        </a:rPr>
-                        <a:t>280</a:t>
-                      </a:r>
-                      <a:endParaRPr lang="es-BO" sz="1200">
-                        <a:effectLst/>
-                        <a:latin typeface="Arial" panose="020B0604020202020204" pitchFamily="34" charset="0"/>
-                        <a:ea typeface="Calibri" panose="020F0502020204030204" pitchFamily="34" charset="0"/>
-                        <a:cs typeface="Arial" panose="020B0604020202020204" pitchFamily="34" charset="0"/>
-                      </a:endParaRPr>
-                    </a:p>
-                  </a:txBody>
-                  <a:tcPr marL="57254" marR="57254" marT="0" marB="0" anchor="ctr"/>
+                  <a:tcPr>
+                    <a:solidFill>
+                      <a:srgbClr val="1565C0"/>
+                    </a:solidFill>
+                  </a:tcPr>
                 </a:tc>
                 <a:tc>
                   <a:txBody>
                     <a:bodyPr/>
                     <a:lstStyle/>
                     <a:p>
-                      <a:pPr algn="just">
-                        <a:lnSpc>
-                          <a:spcPct val="150000"/>
-                        </a:lnSpc>
-                        <a:spcAft>
-                          <a:spcPts val="0"/>
-                        </a:spcAft>
-                      </a:pPr>
+                      <a:pPr algn="ctr"/>
                       <a:r>
-                        <a:rPr lang="es-ES" sz="1200" dirty="0">
-                          <a:effectLst/>
-                          <a:latin typeface="Arial" panose="020B0604020202020204" pitchFamily="34" charset="0"/>
-                          <a:cs typeface="Arial" panose="020B0604020202020204" pitchFamily="34" charset="0"/>
+                        <a:rPr sz="1300" b="1">
+                          <a:solidFill>
+                            <a:srgbClr val="FFFFFF"/>
+                          </a:solidFill>
+                          <a:latin typeface="Calibri"/>
                         </a:rPr>
-                        <a:t>Hojas Impresas</a:t>
+                        <a:t>Total (Bs)</a:t>
                       </a:r>
-                      <a:endParaRPr lang="es-BO" sz="1200" dirty="0">
-                        <a:effectLst/>
-                        <a:latin typeface="Arial" panose="020B0604020202020204" pitchFamily="34" charset="0"/>
-                        <a:cs typeface="Arial" panose="020B0604020202020204" pitchFamily="34" charset="0"/>
-                      </a:endParaRPr>
                     </a:p>
                   </a:txBody>
-                  <a:tcPr marL="57254" marR="57254" marT="0" marB="0" anchor="ctr"/>
+                  <a:tcPr>
+                    <a:solidFill>
+                      <a:srgbClr val="1565C0"/>
+                    </a:solidFill>
+                  </a:tcPr>
+                </a:tc>
+              </a:tr>
+              <a:tr h="344658">
+                <a:tc>
+                  <a:txBody>
+                    <a:bodyPr/>
+                    <a:lstStyle/>
+                    <a:p>
+                      <a:pPr algn="ctr"/>
+                      <a:r>
+                        <a:rPr sz="1100">
+                          <a:solidFill>
+                            <a:srgbClr val="212121"/>
+                          </a:solidFill>
+                          <a:latin typeface="Calibri"/>
+                        </a:rPr>
+                        <a:t>1</a:t>
+                      </a:r>
+                    </a:p>
+                  </a:txBody>
+                  <a:tcPr>
+                    <a:solidFill>
+                      <a:srgbClr val="F5F5F5"/>
+                    </a:solidFill>
+                  </a:tcPr>
                 </a:tc>
                 <a:tc>
                   <a:txBody>
                     <a:bodyPr/>
                     <a:lstStyle/>
                     <a:p>
-                      <a:pPr algn="just">
-                        <a:lnSpc>
-                          <a:spcPct val="150000"/>
-                        </a:lnSpc>
-                        <a:spcAft>
-                          <a:spcPts val="0"/>
-                        </a:spcAft>
-                      </a:pPr>
+                      <a:pPr algn="ctr"/>
                       <a:r>
-                        <a:rPr lang="es-BO" sz="1200">
-                          <a:effectLst/>
-                          <a:latin typeface="Arial" panose="020B0604020202020204" pitchFamily="34" charset="0"/>
-                          <a:cs typeface="Arial" panose="020B0604020202020204" pitchFamily="34" charset="0"/>
+                        <a:rPr sz="1100">
+                          <a:solidFill>
+                            <a:srgbClr val="212121"/>
+                          </a:solidFill>
+                          <a:latin typeface="Calibri"/>
                         </a:rPr>
-                        <a:t> </a:t>
+                        <a:t>6 unid.</a:t>
                       </a:r>
-                      <a:endParaRPr lang="es-BO" sz="1200">
-                        <a:effectLst/>
-                        <a:latin typeface="Arial" panose="020B0604020202020204" pitchFamily="34" charset="0"/>
-                        <a:ea typeface="Calibri" panose="020F0502020204030204" pitchFamily="34" charset="0"/>
-                        <a:cs typeface="Arial" panose="020B0604020202020204" pitchFamily="34" charset="0"/>
-                      </a:endParaRPr>
                     </a:p>
                   </a:txBody>
-                  <a:tcPr marL="57254" marR="57254" marT="0" marB="0" anchor="ctr"/>
+                  <a:tcPr>
+                    <a:solidFill>
+                      <a:srgbClr val="F5F5F5"/>
+                    </a:solidFill>
+                  </a:tcPr>
                 </a:tc>
                 <a:tc>
                   <a:txBody>
                     <a:bodyPr/>
                     <a:lstStyle/>
                     <a:p>
-                      <a:pPr algn="just">
-                        <a:lnSpc>
-                          <a:spcPct val="150000"/>
-                        </a:lnSpc>
-                        <a:spcAft>
-                          <a:spcPts val="0"/>
-                        </a:spcAft>
-                      </a:pPr>
+                      <a:pPr algn="l"/>
                       <a:r>
-                        <a:rPr lang="es-BO" sz="1200">
-                          <a:effectLst/>
-                          <a:latin typeface="Arial" panose="020B0604020202020204" pitchFamily="34" charset="0"/>
-                          <a:cs typeface="Arial" panose="020B0604020202020204" pitchFamily="34" charset="0"/>
+                        <a:rPr sz="1100">
+                          <a:solidFill>
+                            <a:srgbClr val="212121"/>
+                          </a:solidFill>
+                          <a:latin typeface="Calibri"/>
                         </a:rPr>
-                        <a:t>80 Bs.</a:t>
+                        <a:t>Controladores K-Rain BL-KR (2 BL-KR2 + 3 BL-KR4 + 1 BL-KR6)</a:t>
                       </a:r>
-                      <a:endParaRPr lang="es-BO" sz="1200">
-                        <a:effectLst/>
-                        <a:latin typeface="Arial" panose="020B0604020202020204" pitchFamily="34" charset="0"/>
-                        <a:ea typeface="Calibri" panose="020F0502020204030204" pitchFamily="34" charset="0"/>
-                        <a:cs typeface="Arial" panose="020B0604020202020204" pitchFamily="34" charset="0"/>
-                      </a:endParaRPr>
                     </a:p>
                   </a:txBody>
-                  <a:tcPr marL="57254" marR="57254" marT="0" marB="0" anchor="ctr"/>
-                </a:tc>
-                <a:extLst>
-                  <a:ext uri="{0D108BD9-81ED-4DB2-BD59-A6C34878D82A}">
-                    <a16:rowId xmlns:a16="http://schemas.microsoft.com/office/drawing/2014/main" val="10001"/>
-                  </a:ext>
-                </a:extLst>
-              </a:tr>
-              <a:tr h="467321">
-                <a:tc>
-                  <a:txBody>
-                    <a:bodyPr/>
-                    <a:lstStyle/>
-                    <a:p>
-                      <a:pPr algn="just">
-                        <a:lnSpc>
-                          <a:spcPct val="150000"/>
-                        </a:lnSpc>
-                        <a:spcAft>
-                          <a:spcPts val="0"/>
-                        </a:spcAft>
-                      </a:pPr>
-                      <a:r>
-                        <a:rPr lang="es-BO" sz="1200">
-                          <a:effectLst/>
-                          <a:latin typeface="Arial" panose="020B0604020202020204" pitchFamily="34" charset="0"/>
-                          <a:cs typeface="Arial" panose="020B0604020202020204" pitchFamily="34" charset="0"/>
-                        </a:rPr>
-                        <a:t>2</a:t>
-                      </a:r>
-                      <a:endParaRPr lang="es-BO" sz="1200">
-                        <a:effectLst/>
-                        <a:latin typeface="Arial" panose="020B0604020202020204" pitchFamily="34" charset="0"/>
-                        <a:ea typeface="Calibri" panose="020F0502020204030204" pitchFamily="34" charset="0"/>
-                        <a:cs typeface="Arial" panose="020B0604020202020204" pitchFamily="34" charset="0"/>
-                      </a:endParaRPr>
-                    </a:p>
-                  </a:txBody>
-                  <a:tcPr marL="57254" marR="57254" marT="0" marB="0" anchor="ctr"/>
+                  <a:tcPr>
+                    <a:solidFill>
+                      <a:srgbClr val="F5F5F5"/>
+                    </a:solidFill>
+                  </a:tcPr>
                 </a:tc>
                 <a:tc>
                   <a:txBody>
                     <a:bodyPr/>
                     <a:lstStyle/>
                     <a:p>
-                      <a:pPr algn="just">
-                        <a:lnSpc>
-                          <a:spcPct val="150000"/>
-                        </a:lnSpc>
-                        <a:spcAft>
-                          <a:spcPts val="0"/>
-                        </a:spcAft>
-                      </a:pPr>
+                      <a:pPr algn="r"/>
                       <a:r>
-                        <a:rPr lang="es-ES" sz="1200" dirty="0">
-                          <a:effectLst/>
-                          <a:latin typeface="Arial" panose="020B0604020202020204" pitchFamily="34" charset="0"/>
-                          <a:cs typeface="Arial" panose="020B0604020202020204" pitchFamily="34" charset="0"/>
+                        <a:rPr sz="1100">
+                          <a:solidFill>
+                            <a:srgbClr val="212121"/>
+                          </a:solidFill>
+                          <a:latin typeface="Calibri"/>
                         </a:rPr>
-                        <a:t>anillados</a:t>
+                        <a:t>—</a:t>
                       </a:r>
-                      <a:endParaRPr lang="es-BO" sz="1200" dirty="0">
-                        <a:effectLst/>
-                        <a:latin typeface="Arial" panose="020B0604020202020204" pitchFamily="34" charset="0"/>
-                        <a:cs typeface="Arial" panose="020B0604020202020204" pitchFamily="34" charset="0"/>
-                      </a:endParaRPr>
                     </a:p>
                   </a:txBody>
-                  <a:tcPr marL="57254" marR="57254" marT="0" marB="0" anchor="ctr"/>
+                  <a:tcPr>
+                    <a:solidFill>
+                      <a:srgbClr val="F5F5F5"/>
+                    </a:solidFill>
+                  </a:tcPr>
                 </a:tc>
                 <a:tc>
                   <a:txBody>
                     <a:bodyPr/>
                     <a:lstStyle/>
                     <a:p>
-                      <a:pPr algn="just">
-                        <a:lnSpc>
-                          <a:spcPct val="150000"/>
-                        </a:lnSpc>
-                        <a:spcAft>
-                          <a:spcPts val="0"/>
-                        </a:spcAft>
-                      </a:pPr>
+                      <a:pPr algn="r"/>
                       <a:r>
-                        <a:rPr lang="es-BO" sz="1200">
-                          <a:effectLst/>
-                          <a:latin typeface="Arial" panose="020B0604020202020204" pitchFamily="34" charset="0"/>
-                          <a:cs typeface="Arial" panose="020B0604020202020204" pitchFamily="34" charset="0"/>
+                        <a:rPr sz="1100">
+                          <a:solidFill>
+                            <a:srgbClr val="212121"/>
+                          </a:solidFill>
+                          <a:latin typeface="Calibri"/>
                         </a:rPr>
-                        <a:t> </a:t>
+                        <a:t>12.400</a:t>
                       </a:r>
-                      <a:endParaRPr lang="es-BO" sz="1200">
-                        <a:effectLst/>
-                        <a:latin typeface="Arial" panose="020B0604020202020204" pitchFamily="34" charset="0"/>
-                        <a:ea typeface="Calibri" panose="020F0502020204030204" pitchFamily="34" charset="0"/>
-                        <a:cs typeface="Arial" panose="020B0604020202020204" pitchFamily="34" charset="0"/>
-                      </a:endParaRPr>
                     </a:p>
                   </a:txBody>
-                  <a:tcPr marL="57254" marR="57254" marT="0" marB="0" anchor="ctr"/>
+                  <a:tcPr>
+                    <a:solidFill>
+                      <a:srgbClr val="F5F5F5"/>
+                    </a:solidFill>
+                  </a:tcPr>
+                </a:tc>
+              </a:tr>
+              <a:tr h="344658">
+                <a:tc>
+                  <a:txBody>
+                    <a:bodyPr/>
+                    <a:lstStyle/>
+                    <a:p>
+                      <a:pPr algn="ctr"/>
+                      <a:r>
+                        <a:rPr sz="1100">
+                          <a:solidFill>
+                            <a:srgbClr val="212121"/>
+                          </a:solidFill>
+                          <a:latin typeface="Calibri"/>
+                        </a:rPr>
+                        <a:t>2</a:t>
+                      </a:r>
+                    </a:p>
+                  </a:txBody>
+                  <a:tcPr>
+                    <a:solidFill>
+                      <a:srgbClr val="FFFFFF"/>
+                    </a:solidFill>
+                  </a:tcPr>
                 </a:tc>
                 <a:tc>
                   <a:txBody>
                     <a:bodyPr/>
                     <a:lstStyle/>
                     <a:p>
-                      <a:pPr algn="just">
-                        <a:lnSpc>
-                          <a:spcPct val="150000"/>
-                        </a:lnSpc>
-                        <a:spcAft>
-                          <a:spcPts val="0"/>
-                        </a:spcAft>
-                      </a:pPr>
+                      <a:pPr algn="ctr"/>
                       <a:r>
-                        <a:rPr lang="es-BO" sz="1200">
-                          <a:effectLst/>
-                          <a:latin typeface="Arial" panose="020B0604020202020204" pitchFamily="34" charset="0"/>
-                          <a:cs typeface="Arial" panose="020B0604020202020204" pitchFamily="34" charset="0"/>
+                        <a:rPr sz="1100">
+                          <a:solidFill>
+                            <a:srgbClr val="212121"/>
+                          </a:solidFill>
+                          <a:latin typeface="Calibri"/>
                         </a:rPr>
-                        <a:t>50 Bs. </a:t>
+                        <a:t>22 unid.</a:t>
                       </a:r>
-                      <a:endParaRPr lang="es-BO" sz="1200">
-                        <a:effectLst/>
-                        <a:latin typeface="Arial" panose="020B0604020202020204" pitchFamily="34" charset="0"/>
-                        <a:ea typeface="Calibri" panose="020F0502020204030204" pitchFamily="34" charset="0"/>
-                        <a:cs typeface="Arial" panose="020B0604020202020204" pitchFamily="34" charset="0"/>
-                      </a:endParaRPr>
                     </a:p>
                   </a:txBody>
-                  <a:tcPr marL="57254" marR="57254" marT="0" marB="0" anchor="ctr"/>
-                </a:tc>
-                <a:extLst>
-                  <a:ext uri="{0D108BD9-81ED-4DB2-BD59-A6C34878D82A}">
-                    <a16:rowId xmlns:a16="http://schemas.microsoft.com/office/drawing/2014/main" val="10002"/>
-                  </a:ext>
-                </a:extLst>
-              </a:tr>
-              <a:tr h="467321">
-                <a:tc>
-                  <a:txBody>
-                    <a:bodyPr/>
-                    <a:lstStyle/>
-                    <a:p>
-                      <a:pPr algn="just">
-                        <a:lnSpc>
-                          <a:spcPct val="150000"/>
-                        </a:lnSpc>
-                        <a:spcAft>
-                          <a:spcPts val="0"/>
-                        </a:spcAft>
-                      </a:pPr>
-                      <a:r>
-                        <a:rPr lang="es-BO" sz="1200" dirty="0">
-                          <a:effectLst/>
-                          <a:latin typeface="Arial" panose="020B0604020202020204" pitchFamily="34" charset="0"/>
-                          <a:cs typeface="Arial" panose="020B0604020202020204" pitchFamily="34" charset="0"/>
-                        </a:rPr>
-                        <a:t>1</a:t>
-                      </a:r>
-                      <a:endParaRPr lang="es-BO" sz="1200" dirty="0">
-                        <a:effectLst/>
-                        <a:latin typeface="Arial" panose="020B0604020202020204" pitchFamily="34" charset="0"/>
-                        <a:ea typeface="Calibri" panose="020F0502020204030204" pitchFamily="34" charset="0"/>
-                        <a:cs typeface="Arial" panose="020B0604020202020204" pitchFamily="34" charset="0"/>
-                      </a:endParaRPr>
-                    </a:p>
-                  </a:txBody>
-                  <a:tcPr marL="57254" marR="57254" marT="0" marB="0" anchor="ctr"/>
+                  <a:tcPr>
+                    <a:solidFill>
+                      <a:srgbClr val="FFFFFF"/>
+                    </a:solidFill>
+                  </a:tcPr>
                 </a:tc>
                 <a:tc>
                   <a:txBody>
                     <a:bodyPr/>
                     <a:lstStyle/>
                     <a:p>
-                      <a:pPr algn="just">
-                        <a:lnSpc>
-                          <a:spcPct val="150000"/>
-                        </a:lnSpc>
-                        <a:spcAft>
-                          <a:spcPts val="0"/>
-                        </a:spcAft>
-                      </a:pPr>
+                      <a:pPr algn="l"/>
                       <a:r>
-                        <a:rPr lang="es-ES" sz="1200" dirty="0">
-                          <a:effectLst/>
-                          <a:latin typeface="Arial" panose="020B0604020202020204" pitchFamily="34" charset="0"/>
-                          <a:cs typeface="Arial" panose="020B0604020202020204" pitchFamily="34" charset="0"/>
+                        <a:rPr sz="1100">
+                          <a:solidFill>
+                            <a:srgbClr val="212121"/>
+                          </a:solidFill>
+                          <a:latin typeface="Calibri"/>
                         </a:rPr>
-                        <a:t>Adquisición de Licencias</a:t>
+                        <a:t>Electroválvulas K-Rain BSPT 9V DC latching</a:t>
                       </a:r>
-                      <a:endParaRPr lang="es-BO" sz="1200" dirty="0">
-                        <a:effectLst/>
-                        <a:latin typeface="Arial" panose="020B0604020202020204" pitchFamily="34" charset="0"/>
-                        <a:cs typeface="Arial" panose="020B0604020202020204" pitchFamily="34" charset="0"/>
-                      </a:endParaRPr>
                     </a:p>
                   </a:txBody>
-                  <a:tcPr marL="57254" marR="57254" marT="0" marB="0" anchor="ctr"/>
+                  <a:tcPr>
+                    <a:solidFill>
+                      <a:srgbClr val="FFFFFF"/>
+                    </a:solidFill>
+                  </a:tcPr>
                 </a:tc>
                 <a:tc>
                   <a:txBody>
                     <a:bodyPr/>
                     <a:lstStyle/>
                     <a:p>
-                      <a:pPr algn="just">
-                        <a:lnSpc>
-                          <a:spcPct val="150000"/>
-                        </a:lnSpc>
-                        <a:spcAft>
-                          <a:spcPts val="0"/>
-                        </a:spcAft>
-                      </a:pPr>
+                      <a:pPr algn="r"/>
                       <a:r>
-                        <a:rPr lang="es-BO" sz="1200">
-                          <a:effectLst/>
-                          <a:latin typeface="Arial" panose="020B0604020202020204" pitchFamily="34" charset="0"/>
-                          <a:cs typeface="Arial" panose="020B0604020202020204" pitchFamily="34" charset="0"/>
+                        <a:rPr sz="1100">
+                          <a:solidFill>
+                            <a:srgbClr val="212121"/>
+                          </a:solidFill>
+                          <a:latin typeface="Calibri"/>
                         </a:rPr>
-                        <a:t>0</a:t>
+                        <a:t>380</a:t>
                       </a:r>
-                      <a:endParaRPr lang="es-BO" sz="1200">
-                        <a:effectLst/>
-                        <a:latin typeface="Arial" panose="020B0604020202020204" pitchFamily="34" charset="0"/>
-                        <a:ea typeface="Calibri" panose="020F0502020204030204" pitchFamily="34" charset="0"/>
-                        <a:cs typeface="Arial" panose="020B0604020202020204" pitchFamily="34" charset="0"/>
-                      </a:endParaRPr>
                     </a:p>
                   </a:txBody>
-                  <a:tcPr marL="57254" marR="57254" marT="0" marB="0" anchor="ctr"/>
+                  <a:tcPr>
+                    <a:solidFill>
+                      <a:srgbClr val="FFFFFF"/>
+                    </a:solidFill>
+                  </a:tcPr>
                 </a:tc>
                 <a:tc>
                   <a:txBody>
                     <a:bodyPr/>
                     <a:lstStyle/>
                     <a:p>
-                      <a:pPr algn="just">
-                        <a:lnSpc>
-                          <a:spcPct val="150000"/>
-                        </a:lnSpc>
-                        <a:spcAft>
-                          <a:spcPts val="0"/>
-                        </a:spcAft>
-                      </a:pPr>
+                      <a:pPr algn="r"/>
                       <a:r>
-                        <a:rPr lang="es-BO" sz="1200">
-                          <a:effectLst/>
-                          <a:latin typeface="Arial" panose="020B0604020202020204" pitchFamily="34" charset="0"/>
-                          <a:cs typeface="Arial" panose="020B0604020202020204" pitchFamily="34" charset="0"/>
+                        <a:rPr sz="1100">
+                          <a:solidFill>
+                            <a:srgbClr val="212121"/>
+                          </a:solidFill>
+                          <a:latin typeface="Calibri"/>
                         </a:rPr>
-                        <a:t>0</a:t>
+                        <a:t>8.360</a:t>
                       </a:r>
-                      <a:endParaRPr lang="es-BO" sz="1200">
-                        <a:effectLst/>
-                        <a:latin typeface="Arial" panose="020B0604020202020204" pitchFamily="34" charset="0"/>
-                        <a:ea typeface="Calibri" panose="020F0502020204030204" pitchFamily="34" charset="0"/>
-                        <a:cs typeface="Arial" panose="020B0604020202020204" pitchFamily="34" charset="0"/>
-                      </a:endParaRPr>
                     </a:p>
                   </a:txBody>
-                  <a:tcPr marL="57254" marR="57254" marT="0" marB="0" anchor="ctr"/>
+                  <a:tcPr>
+                    <a:solidFill>
+                      <a:srgbClr val="FFFFFF"/>
+                    </a:solidFill>
+                  </a:tcPr>
                 </a:tc>
-                <a:extLst>
-                  <a:ext uri="{0D108BD9-81ED-4DB2-BD59-A6C34878D82A}">
-                    <a16:rowId xmlns:a16="http://schemas.microsoft.com/office/drawing/2014/main" val="10003"/>
-                  </a:ext>
-                </a:extLst>
               </a:tr>
-              <a:tr h="467321">
+              <a:tr h="344658">
                 <a:tc>
                   <a:txBody>
                     <a:bodyPr/>
                     <a:lstStyle/>
                     <a:p>
-                      <a:pPr algn="just">
-                        <a:lnSpc>
-                          <a:spcPct val="150000"/>
-                        </a:lnSpc>
-                        <a:spcAft>
-                          <a:spcPts val="0"/>
-                        </a:spcAft>
-                      </a:pPr>
+                      <a:pPr algn="ctr"/>
                       <a:r>
-                        <a:rPr lang="es-BO" sz="1200">
-                          <a:effectLst/>
-                          <a:latin typeface="Arial" panose="020B0604020202020204" pitchFamily="34" charset="0"/>
-                          <a:cs typeface="Arial" panose="020B0604020202020204" pitchFamily="34" charset="0"/>
+                        <a:rPr sz="1100">
+                          <a:solidFill>
+                            <a:srgbClr val="212121"/>
+                          </a:solidFill>
+                          <a:latin typeface="Calibri"/>
                         </a:rPr>
-                        <a:t>2 meses</a:t>
+                        <a:t>3</a:t>
                       </a:r>
-                      <a:endParaRPr lang="es-BO" sz="1200">
-                        <a:effectLst/>
-                        <a:latin typeface="Arial" panose="020B0604020202020204" pitchFamily="34" charset="0"/>
-                        <a:ea typeface="Calibri" panose="020F0502020204030204" pitchFamily="34" charset="0"/>
-                        <a:cs typeface="Arial" panose="020B0604020202020204" pitchFamily="34" charset="0"/>
-                      </a:endParaRPr>
                     </a:p>
                   </a:txBody>
-                  <a:tcPr marL="57254" marR="57254" marT="0" marB="0" anchor="ctr"/>
+                  <a:tcPr>
+                    <a:solidFill>
+                      <a:srgbClr val="F5F5F5"/>
+                    </a:solidFill>
+                  </a:tcPr>
                 </a:tc>
                 <a:tc>
                   <a:txBody>
                     <a:bodyPr/>
                     <a:lstStyle/>
                     <a:p>
-                      <a:pPr algn="just">
-                        <a:lnSpc>
-                          <a:spcPct val="150000"/>
-                        </a:lnSpc>
-                        <a:spcAft>
-                          <a:spcPts val="0"/>
-                        </a:spcAft>
-                      </a:pPr>
+                      <a:pPr algn="ctr"/>
                       <a:r>
-                        <a:rPr lang="es-BO" sz="1200" dirty="0">
-                          <a:effectLst/>
-                          <a:latin typeface="Arial" panose="020B0604020202020204" pitchFamily="34" charset="0"/>
-                          <a:cs typeface="Arial" panose="020B0604020202020204" pitchFamily="34" charset="0"/>
+                        <a:rPr sz="1100">
+                          <a:solidFill>
+                            <a:srgbClr val="212121"/>
+                          </a:solidFill>
+                          <a:latin typeface="Calibri"/>
                         </a:rPr>
-                        <a:t>Servició de internet</a:t>
+                        <a:t>13 rollos</a:t>
                       </a:r>
                     </a:p>
                   </a:txBody>
-                  <a:tcPr marL="57254" marR="57254" marT="0" marB="0" anchor="ctr"/>
+                  <a:tcPr>
+                    <a:solidFill>
+                      <a:srgbClr val="F5F5F5"/>
+                    </a:solidFill>
+                  </a:tcPr>
                 </a:tc>
                 <a:tc>
                   <a:txBody>
                     <a:bodyPr/>
                     <a:lstStyle/>
                     <a:p>
-                      <a:pPr algn="just">
-                        <a:lnSpc>
-                          <a:spcPct val="150000"/>
-                        </a:lnSpc>
-                        <a:spcAft>
-                          <a:spcPts val="0"/>
-                        </a:spcAft>
-                      </a:pPr>
+                      <a:pPr algn="l"/>
                       <a:r>
-                        <a:rPr lang="es-BO" sz="1200">
-                          <a:effectLst/>
-                          <a:latin typeface="Arial" panose="020B0604020202020204" pitchFamily="34" charset="0"/>
-                          <a:cs typeface="Arial" panose="020B0604020202020204" pitchFamily="34" charset="0"/>
+                        <a:rPr sz="1100">
+                          <a:solidFill>
+                            <a:srgbClr val="212121"/>
+                          </a:solidFill>
+                          <a:latin typeface="Calibri"/>
                         </a:rPr>
-                        <a:t>150 Bs. mes</a:t>
+                        <a:t>Cable 20 AWG monofilar + politubo 3/4"</a:t>
                       </a:r>
-                      <a:endParaRPr lang="es-BO" sz="1200">
-                        <a:effectLst/>
-                        <a:latin typeface="Arial" panose="020B0604020202020204" pitchFamily="34" charset="0"/>
-                        <a:ea typeface="Calibri" panose="020F0502020204030204" pitchFamily="34" charset="0"/>
-                        <a:cs typeface="Arial" panose="020B0604020202020204" pitchFamily="34" charset="0"/>
-                      </a:endParaRPr>
                     </a:p>
                   </a:txBody>
-                  <a:tcPr marL="57254" marR="57254" marT="0" marB="0" anchor="ctr"/>
+                  <a:tcPr>
+                    <a:solidFill>
+                      <a:srgbClr val="F5F5F5"/>
+                    </a:solidFill>
+                  </a:tcPr>
                 </a:tc>
                 <a:tc>
                   <a:txBody>
                     <a:bodyPr/>
                     <a:lstStyle/>
                     <a:p>
-                      <a:pPr algn="just">
-                        <a:lnSpc>
-                          <a:spcPct val="150000"/>
-                        </a:lnSpc>
-                        <a:spcAft>
-                          <a:spcPts val="0"/>
-                        </a:spcAft>
-                      </a:pPr>
+                      <a:pPr algn="r"/>
                       <a:r>
-                        <a:rPr lang="es-BO" sz="1200">
-                          <a:effectLst/>
-                          <a:latin typeface="Arial" panose="020B0604020202020204" pitchFamily="34" charset="0"/>
-                          <a:cs typeface="Arial" panose="020B0604020202020204" pitchFamily="34" charset="0"/>
+                        <a:rPr sz="1100">
+                          <a:solidFill>
+                            <a:srgbClr val="212121"/>
+                          </a:solidFill>
+                          <a:latin typeface="Calibri"/>
                         </a:rPr>
-                        <a:t>300 Bs.</a:t>
+                        <a:t>—</a:t>
                       </a:r>
-                      <a:endParaRPr lang="es-BO" sz="1200">
-                        <a:effectLst/>
-                        <a:latin typeface="Arial" panose="020B0604020202020204" pitchFamily="34" charset="0"/>
-                        <a:ea typeface="Calibri" panose="020F0502020204030204" pitchFamily="34" charset="0"/>
-                        <a:cs typeface="Arial" panose="020B0604020202020204" pitchFamily="34" charset="0"/>
-                      </a:endParaRPr>
                     </a:p>
                   </a:txBody>
-                  <a:tcPr marL="57254" marR="57254" marT="0" marB="0" anchor="ctr"/>
-                </a:tc>
-                <a:extLst>
-                  <a:ext uri="{0D108BD9-81ED-4DB2-BD59-A6C34878D82A}">
-                    <a16:rowId xmlns:a16="http://schemas.microsoft.com/office/drawing/2014/main" val="10004"/>
-                  </a:ext>
-                </a:extLst>
-              </a:tr>
-              <a:tr h="467321">
-                <a:tc>
-                  <a:txBody>
-                    <a:bodyPr/>
-                    <a:lstStyle/>
-                    <a:p>
-                      <a:pPr algn="just">
-                        <a:lnSpc>
-                          <a:spcPct val="150000"/>
-                        </a:lnSpc>
-                        <a:spcAft>
-                          <a:spcPts val="0"/>
-                        </a:spcAft>
-                      </a:pPr>
-                      <a:r>
-                        <a:rPr lang="es-BO" sz="1200">
-                          <a:effectLst/>
-                          <a:latin typeface="Arial" panose="020B0604020202020204" pitchFamily="34" charset="0"/>
-                          <a:cs typeface="Arial" panose="020B0604020202020204" pitchFamily="34" charset="0"/>
-                        </a:rPr>
-                        <a:t>2 meses</a:t>
-                      </a:r>
-                      <a:endParaRPr lang="es-BO" sz="1200">
-                        <a:effectLst/>
-                        <a:latin typeface="Arial" panose="020B0604020202020204" pitchFamily="34" charset="0"/>
-                        <a:ea typeface="Calibri" panose="020F0502020204030204" pitchFamily="34" charset="0"/>
-                        <a:cs typeface="Arial" panose="020B0604020202020204" pitchFamily="34" charset="0"/>
-                      </a:endParaRPr>
-                    </a:p>
-                  </a:txBody>
-                  <a:tcPr marL="57254" marR="57254" marT="0" marB="0" anchor="ctr"/>
+                  <a:tcPr>
+                    <a:solidFill>
+                      <a:srgbClr val="F5F5F5"/>
+                    </a:solidFill>
+                  </a:tcPr>
                 </a:tc>
                 <a:tc>
                   <a:txBody>
                     <a:bodyPr/>
                     <a:lstStyle/>
                     <a:p>
-                      <a:pPr algn="just">
-                        <a:lnSpc>
-                          <a:spcPct val="150000"/>
-                        </a:lnSpc>
-                        <a:spcAft>
-                          <a:spcPts val="0"/>
-                        </a:spcAft>
-                      </a:pPr>
+                      <a:pPr algn="r"/>
                       <a:r>
-                        <a:rPr lang="es-BO" sz="1200" dirty="0">
-                          <a:effectLst/>
-                          <a:latin typeface="Arial" panose="020B0604020202020204" pitchFamily="34" charset="0"/>
-                          <a:cs typeface="Arial" panose="020B0604020202020204" pitchFamily="34" charset="0"/>
+                        <a:rPr sz="1100">
+                          <a:solidFill>
+                            <a:srgbClr val="212121"/>
+                          </a:solidFill>
+                          <a:latin typeface="Calibri"/>
                         </a:rPr>
-                        <a:t>Gastos de electricidad</a:t>
+                        <a:t>1.860</a:t>
                       </a:r>
                     </a:p>
                   </a:txBody>
-                  <a:tcPr marL="57254" marR="57254" marT="0" marB="0" anchor="ctr"/>
+                  <a:tcPr>
+                    <a:solidFill>
+                      <a:srgbClr val="F5F5F5"/>
+                    </a:solidFill>
+                  </a:tcPr>
+                </a:tc>
+              </a:tr>
+              <a:tr h="344658">
+                <a:tc>
+                  <a:txBody>
+                    <a:bodyPr/>
+                    <a:lstStyle/>
+                    <a:p>
+                      <a:pPr algn="ctr"/>
+                      <a:r>
+                        <a:rPr sz="1100">
+                          <a:solidFill>
+                            <a:srgbClr val="212121"/>
+                          </a:solidFill>
+                          <a:latin typeface="Calibri"/>
+                        </a:rPr>
+                        <a:t>4</a:t>
+                      </a:r>
+                    </a:p>
+                  </a:txBody>
+                  <a:tcPr>
+                    <a:solidFill>
+                      <a:srgbClr val="FFFFFF"/>
+                    </a:solidFill>
+                  </a:tcPr>
                 </a:tc>
                 <a:tc>
                   <a:txBody>
                     <a:bodyPr/>
                     <a:lstStyle/>
                     <a:p>
-                      <a:pPr algn="just">
-                        <a:lnSpc>
-                          <a:spcPct val="150000"/>
-                        </a:lnSpc>
-                        <a:spcAft>
-                          <a:spcPts val="0"/>
-                        </a:spcAft>
-                      </a:pPr>
+                      <a:pPr algn="ctr"/>
                       <a:r>
-                        <a:rPr lang="es-BO" sz="1200">
-                          <a:effectLst/>
-                          <a:latin typeface="Arial" panose="020B0604020202020204" pitchFamily="34" charset="0"/>
-                          <a:cs typeface="Arial" panose="020B0604020202020204" pitchFamily="34" charset="0"/>
+                        <a:rPr sz="1100">
+                          <a:solidFill>
+                            <a:srgbClr val="212121"/>
+                          </a:solidFill>
+                          <a:latin typeface="Calibri"/>
                         </a:rPr>
-                        <a:t>30 Bs. Mes</a:t>
+                        <a:t>120 m</a:t>
                       </a:r>
-                      <a:endParaRPr lang="es-BO" sz="1200">
-                        <a:effectLst/>
-                        <a:latin typeface="Arial" panose="020B0604020202020204" pitchFamily="34" charset="0"/>
-                        <a:ea typeface="Calibri" panose="020F0502020204030204" pitchFamily="34" charset="0"/>
-                        <a:cs typeface="Arial" panose="020B0604020202020204" pitchFamily="34" charset="0"/>
-                      </a:endParaRPr>
                     </a:p>
                   </a:txBody>
-                  <a:tcPr marL="57254" marR="57254" marT="0" marB="0" anchor="ctr"/>
+                  <a:tcPr>
+                    <a:solidFill>
+                      <a:srgbClr val="FFFFFF"/>
+                    </a:solidFill>
+                  </a:tcPr>
                 </a:tc>
                 <a:tc>
                   <a:txBody>
                     <a:bodyPr/>
                     <a:lstStyle/>
                     <a:p>
-                      <a:pPr algn="just">
-                        <a:lnSpc>
-                          <a:spcPct val="150000"/>
-                        </a:lnSpc>
-                        <a:spcAft>
-                          <a:spcPts val="0"/>
-                        </a:spcAft>
-                      </a:pPr>
+                      <a:pPr algn="l"/>
                       <a:r>
-                        <a:rPr lang="es-BO" sz="1200">
-                          <a:effectLst/>
-                          <a:latin typeface="Arial" panose="020B0604020202020204" pitchFamily="34" charset="0"/>
-                          <a:cs typeface="Arial" panose="020B0604020202020204" pitchFamily="34" charset="0"/>
+                        <a:rPr sz="1100">
+                          <a:solidFill>
+                            <a:srgbClr val="212121"/>
+                          </a:solidFill>
+                          <a:latin typeface="Calibri"/>
                         </a:rPr>
-                        <a:t>60 Bs.</a:t>
+                        <a:t>Tubería PVC matriz 2" (incluye accesorios)</a:t>
                       </a:r>
-                      <a:endParaRPr lang="es-BO" sz="1200">
-                        <a:effectLst/>
-                        <a:latin typeface="Arial" panose="020B0604020202020204" pitchFamily="34" charset="0"/>
-                        <a:ea typeface="Calibri" panose="020F0502020204030204" pitchFamily="34" charset="0"/>
-                        <a:cs typeface="Arial" panose="020B0604020202020204" pitchFamily="34" charset="0"/>
-                      </a:endParaRPr>
                     </a:p>
                   </a:txBody>
-                  <a:tcPr marL="57254" marR="57254" marT="0" marB="0" anchor="ctr"/>
-                </a:tc>
-                <a:extLst>
-                  <a:ext uri="{0D108BD9-81ED-4DB2-BD59-A6C34878D82A}">
-                    <a16:rowId xmlns:a16="http://schemas.microsoft.com/office/drawing/2014/main" val="10005"/>
-                  </a:ext>
-                </a:extLst>
-              </a:tr>
-              <a:tr h="218299">
-                <a:tc>
-                  <a:txBody>
-                    <a:bodyPr/>
-                    <a:lstStyle/>
-                    <a:p>
-                      <a:pPr algn="just">
-                        <a:lnSpc>
-                          <a:spcPct val="150000"/>
-                        </a:lnSpc>
-                        <a:spcAft>
-                          <a:spcPts val="0"/>
-                        </a:spcAft>
-                      </a:pPr>
-                      <a:r>
-                        <a:rPr lang="es-ES" sz="1200">
-                          <a:effectLst/>
-                          <a:latin typeface="Arial" panose="020B0604020202020204" pitchFamily="34" charset="0"/>
-                          <a:cs typeface="Arial" panose="020B0604020202020204" pitchFamily="34" charset="0"/>
-                        </a:rPr>
-                        <a:t>1 mes </a:t>
-                      </a:r>
-                      <a:endParaRPr lang="es-BO" sz="1200">
-                        <a:effectLst/>
-                        <a:latin typeface="Arial" panose="020B0604020202020204" pitchFamily="34" charset="0"/>
-                        <a:ea typeface="Calibri" panose="020F0502020204030204" pitchFamily="34" charset="0"/>
-                        <a:cs typeface="Arial" panose="020B0604020202020204" pitchFamily="34" charset="0"/>
-                      </a:endParaRPr>
-                    </a:p>
-                  </a:txBody>
-                  <a:tcPr marL="57254" marR="57254" marT="0" marB="0" anchor="ctr"/>
+                  <a:tcPr>
+                    <a:solidFill>
+                      <a:srgbClr val="FFFFFF"/>
+                    </a:solidFill>
+                  </a:tcPr>
                 </a:tc>
                 <a:tc>
                   <a:txBody>
                     <a:bodyPr/>
                     <a:lstStyle/>
                     <a:p>
-                      <a:pPr algn="just">
-                        <a:lnSpc>
-                          <a:spcPct val="150000"/>
-                        </a:lnSpc>
-                        <a:spcAft>
-                          <a:spcPts val="0"/>
-                        </a:spcAft>
-                      </a:pPr>
+                      <a:pPr algn="r"/>
                       <a:r>
-                        <a:rPr lang="es-ES" sz="1200" dirty="0">
-                          <a:effectLst/>
-                          <a:latin typeface="Arial" panose="020B0604020202020204" pitchFamily="34" charset="0"/>
-                          <a:cs typeface="Arial" panose="020B0604020202020204" pitchFamily="34" charset="0"/>
+                        <a:rPr sz="1100">
+                          <a:solidFill>
+                            <a:srgbClr val="212121"/>
+                          </a:solidFill>
+                          <a:latin typeface="Calibri"/>
                         </a:rPr>
-                        <a:t>Costo de desarrollo de software</a:t>
+                        <a:t>35</a:t>
                       </a:r>
-                      <a:endParaRPr lang="es-BO" sz="1200" dirty="0">
-                        <a:effectLst/>
-                        <a:latin typeface="Arial" panose="020B0604020202020204" pitchFamily="34" charset="0"/>
-                        <a:cs typeface="Arial" panose="020B0604020202020204" pitchFamily="34" charset="0"/>
-                      </a:endParaRPr>
                     </a:p>
                   </a:txBody>
-                  <a:tcPr marL="57254" marR="57254" marT="0" marB="0" anchor="ctr"/>
+                  <a:tcPr>
+                    <a:solidFill>
+                      <a:srgbClr val="FFFFFF"/>
+                    </a:solidFill>
+                  </a:tcPr>
                 </a:tc>
                 <a:tc>
                   <a:txBody>
                     <a:bodyPr/>
                     <a:lstStyle/>
                     <a:p>
-                      <a:pPr algn="just">
-                        <a:lnSpc>
-                          <a:spcPct val="150000"/>
-                        </a:lnSpc>
-                        <a:spcAft>
-                          <a:spcPts val="0"/>
-                        </a:spcAft>
-                      </a:pPr>
+                      <a:pPr algn="r"/>
                       <a:r>
-                        <a:rPr lang="es-ES" sz="1200">
-                          <a:effectLst/>
-                          <a:latin typeface="Arial" panose="020B0604020202020204" pitchFamily="34" charset="0"/>
-                          <a:cs typeface="Arial" panose="020B0604020202020204" pitchFamily="34" charset="0"/>
+                        <a:rPr sz="1100">
+                          <a:solidFill>
+                            <a:srgbClr val="212121"/>
+                          </a:solidFill>
+                          <a:latin typeface="Calibri"/>
                         </a:rPr>
-                        <a:t>30 Bs.hora</a:t>
+                        <a:t>4.200</a:t>
                       </a:r>
-                      <a:endParaRPr lang="es-BO" sz="1200">
-                        <a:effectLst/>
-                        <a:latin typeface="Arial" panose="020B0604020202020204" pitchFamily="34" charset="0"/>
-                        <a:ea typeface="Calibri" panose="020F0502020204030204" pitchFamily="34" charset="0"/>
-                        <a:cs typeface="Arial" panose="020B0604020202020204" pitchFamily="34" charset="0"/>
-                      </a:endParaRPr>
                     </a:p>
                   </a:txBody>
-                  <a:tcPr marL="57254" marR="57254" marT="0" marB="0" anchor="ctr"/>
+                  <a:tcPr>
+                    <a:solidFill>
+                      <a:srgbClr val="FFFFFF"/>
+                    </a:solidFill>
+                  </a:tcPr>
+                </a:tc>
+              </a:tr>
+              <a:tr h="344658">
+                <a:tc>
+                  <a:txBody>
+                    <a:bodyPr/>
+                    <a:lstStyle/>
+                    <a:p>
+                      <a:pPr algn="ctr"/>
+                      <a:r>
+                        <a:rPr sz="1100">
+                          <a:solidFill>
+                            <a:srgbClr val="212121"/>
+                          </a:solidFill>
+                          <a:latin typeface="Calibri"/>
+                        </a:rPr>
+                        <a:t>5</a:t>
+                      </a:r>
+                    </a:p>
+                  </a:txBody>
+                  <a:tcPr>
+                    <a:solidFill>
+                      <a:srgbClr val="F5F5F5"/>
+                    </a:solidFill>
+                  </a:tcPr>
                 </a:tc>
                 <a:tc>
                   <a:txBody>
                     <a:bodyPr/>
                     <a:lstStyle/>
                     <a:p>
-                      <a:pPr algn="just">
-                        <a:lnSpc>
-                          <a:spcPct val="150000"/>
-                        </a:lnSpc>
-                        <a:spcAft>
-                          <a:spcPts val="0"/>
-                        </a:spcAft>
-                      </a:pPr>
+                      <a:pPr algn="ctr"/>
                       <a:r>
-                        <a:rPr lang="es-ES" sz="1200">
-                          <a:effectLst/>
-                          <a:latin typeface="Arial" panose="020B0604020202020204" pitchFamily="34" charset="0"/>
-                          <a:cs typeface="Arial" panose="020B0604020202020204" pitchFamily="34" charset="0"/>
+                        <a:rPr sz="1100">
+                          <a:solidFill>
+                            <a:srgbClr val="212121"/>
+                          </a:solidFill>
+                          <a:latin typeface="Calibri"/>
                         </a:rPr>
-                        <a:t>1200 Bs.</a:t>
+                        <a:t>450 m</a:t>
                       </a:r>
-                      <a:endParaRPr lang="es-BO" sz="1200">
-                        <a:effectLst/>
-                        <a:latin typeface="Arial" panose="020B0604020202020204" pitchFamily="34" charset="0"/>
-                        <a:ea typeface="Calibri" panose="020F0502020204030204" pitchFamily="34" charset="0"/>
-                        <a:cs typeface="Arial" panose="020B0604020202020204" pitchFamily="34" charset="0"/>
-                      </a:endParaRPr>
                     </a:p>
                   </a:txBody>
-                  <a:tcPr marL="57254" marR="57254" marT="0" marB="0" anchor="ctr"/>
-                </a:tc>
-                <a:extLst>
-                  <a:ext uri="{0D108BD9-81ED-4DB2-BD59-A6C34878D82A}">
-                    <a16:rowId xmlns:a16="http://schemas.microsoft.com/office/drawing/2014/main" val="10006"/>
-                  </a:ext>
-                </a:extLst>
-              </a:tr>
-              <a:tr h="467321">
-                <a:tc>
-                  <a:txBody>
-                    <a:bodyPr/>
-                    <a:lstStyle/>
-                    <a:p>
-                      <a:pPr algn="just">
-                        <a:lnSpc>
-                          <a:spcPct val="150000"/>
-                        </a:lnSpc>
-                        <a:spcAft>
-                          <a:spcPts val="0"/>
-                        </a:spcAft>
-                      </a:pPr>
-                      <a:r>
-                        <a:rPr lang="es-BO" sz="1200">
-                          <a:effectLst/>
-                          <a:latin typeface="Arial" panose="020B0604020202020204" pitchFamily="34" charset="0"/>
-                          <a:cs typeface="Arial" panose="020B0604020202020204" pitchFamily="34" charset="0"/>
-                        </a:rPr>
-                        <a:t>21</a:t>
-                      </a:r>
-                      <a:endParaRPr lang="es-BO" sz="1200">
-                        <a:effectLst/>
-                        <a:latin typeface="Arial" panose="020B0604020202020204" pitchFamily="34" charset="0"/>
-                        <a:ea typeface="Calibri" panose="020F0502020204030204" pitchFamily="34" charset="0"/>
-                        <a:cs typeface="Arial" panose="020B0604020202020204" pitchFamily="34" charset="0"/>
-                      </a:endParaRPr>
-                    </a:p>
-                  </a:txBody>
-                  <a:tcPr marL="57254" marR="57254" marT="0" marB="0" anchor="ctr"/>
+                  <a:tcPr>
+                    <a:solidFill>
+                      <a:srgbClr val="F5F5F5"/>
+                    </a:solidFill>
+                  </a:tcPr>
                 </a:tc>
                 <a:tc>
                   <a:txBody>
                     <a:bodyPr/>
                     <a:lstStyle/>
                     <a:p>
-                      <a:pPr algn="just">
-                        <a:lnSpc>
-                          <a:spcPct val="150000"/>
-                        </a:lnSpc>
-                        <a:spcAft>
-                          <a:spcPts val="0"/>
-                        </a:spcAft>
-                      </a:pPr>
+                      <a:pPr algn="l"/>
                       <a:r>
-                        <a:rPr lang="es-ES" sz="1200" dirty="0">
-                          <a:effectLst/>
-                          <a:latin typeface="Arial" panose="020B0604020202020204" pitchFamily="34" charset="0"/>
-                          <a:cs typeface="Arial" panose="020B0604020202020204" pitchFamily="34" charset="0"/>
+                        <a:rPr sz="1100">
+                          <a:solidFill>
+                            <a:srgbClr val="212121"/>
+                          </a:solidFill>
+                          <a:latin typeface="Calibri"/>
                         </a:rPr>
-                        <a:t>Adquisición de equipos</a:t>
+                        <a:t>Tubería PVC cuelleras 1 ½" (incluye accesorios)</a:t>
                       </a:r>
-                      <a:endParaRPr lang="es-BO" sz="1200" dirty="0">
-                        <a:effectLst/>
-                        <a:latin typeface="Arial" panose="020B0604020202020204" pitchFamily="34" charset="0"/>
-                        <a:cs typeface="Arial" panose="020B0604020202020204" pitchFamily="34" charset="0"/>
-                      </a:endParaRPr>
-                    </a:p>
-                    <a:p>
-                      <a:pPr algn="just">
-                        <a:lnSpc>
-                          <a:spcPct val="150000"/>
-                        </a:lnSpc>
-                        <a:spcAft>
-                          <a:spcPts val="0"/>
-                        </a:spcAft>
-                      </a:pPr>
-                      <a:endParaRPr lang="es-BO" sz="1200" dirty="0">
-                        <a:effectLst/>
-                        <a:latin typeface="Arial" panose="020B0604020202020204" pitchFamily="34" charset="0"/>
-                        <a:ea typeface="Calibri" panose="020F0502020204030204" pitchFamily="34" charset="0"/>
-                        <a:cs typeface="Arial" panose="020B0604020202020204" pitchFamily="34" charset="0"/>
-                      </a:endParaRPr>
                     </a:p>
                   </a:txBody>
-                  <a:tcPr marL="57254" marR="57254" marT="0" marB="0" anchor="ctr"/>
+                  <a:tcPr>
+                    <a:solidFill>
+                      <a:srgbClr val="F5F5F5"/>
+                    </a:solidFill>
+                  </a:tcPr>
                 </a:tc>
                 <a:tc>
                   <a:txBody>
                     <a:bodyPr/>
                     <a:lstStyle/>
                     <a:p>
-                      <a:pPr algn="just">
-                        <a:lnSpc>
-                          <a:spcPct val="150000"/>
-                        </a:lnSpc>
-                        <a:spcAft>
-                          <a:spcPts val="0"/>
-                        </a:spcAft>
-                      </a:pPr>
+                      <a:pPr algn="r"/>
                       <a:r>
-                        <a:rPr lang="es-BO" sz="1200">
-                          <a:effectLst/>
-                          <a:latin typeface="Arial" panose="020B0604020202020204" pitchFamily="34" charset="0"/>
-                          <a:cs typeface="Arial" panose="020B0604020202020204" pitchFamily="34" charset="0"/>
+                        <a:rPr sz="1100">
+                          <a:solidFill>
+                            <a:srgbClr val="212121"/>
+                          </a:solidFill>
+                          <a:latin typeface="Calibri"/>
                         </a:rPr>
-                        <a:t>1153 Bs.</a:t>
+                        <a:t>22</a:t>
                       </a:r>
-                      <a:endParaRPr lang="es-BO" sz="1200">
-                        <a:effectLst/>
-                        <a:latin typeface="Arial" panose="020B0604020202020204" pitchFamily="34" charset="0"/>
-                        <a:ea typeface="Calibri" panose="020F0502020204030204" pitchFamily="34" charset="0"/>
-                        <a:cs typeface="Arial" panose="020B0604020202020204" pitchFamily="34" charset="0"/>
-                      </a:endParaRPr>
                     </a:p>
                   </a:txBody>
-                  <a:tcPr marL="57254" marR="57254" marT="0" marB="0" anchor="ctr"/>
+                  <a:tcPr>
+                    <a:solidFill>
+                      <a:srgbClr val="F5F5F5"/>
+                    </a:solidFill>
+                  </a:tcPr>
                 </a:tc>
                 <a:tc>
                   <a:txBody>
                     <a:bodyPr/>
                     <a:lstStyle/>
                     <a:p>
-                      <a:pPr algn="just">
-                        <a:lnSpc>
-                          <a:spcPct val="150000"/>
-                        </a:lnSpc>
-                        <a:spcAft>
-                          <a:spcPts val="0"/>
-                        </a:spcAft>
-                      </a:pPr>
+                      <a:pPr algn="r"/>
                       <a:r>
-                        <a:rPr lang="es-BO" sz="1200">
-                          <a:effectLst/>
-                          <a:latin typeface="Arial" panose="020B0604020202020204" pitchFamily="34" charset="0"/>
-                          <a:cs typeface="Arial" panose="020B0604020202020204" pitchFamily="34" charset="0"/>
+                        <a:rPr sz="1100">
+                          <a:solidFill>
+                            <a:srgbClr val="212121"/>
+                          </a:solidFill>
+                          <a:latin typeface="Calibri"/>
                         </a:rPr>
-                        <a:t>1153 Bs.</a:t>
+                        <a:t>9.900</a:t>
                       </a:r>
-                      <a:endParaRPr lang="es-BO" sz="1200">
-                        <a:effectLst/>
-                        <a:latin typeface="Arial" panose="020B0604020202020204" pitchFamily="34" charset="0"/>
-                        <a:ea typeface="Calibri" panose="020F0502020204030204" pitchFamily="34" charset="0"/>
-                        <a:cs typeface="Arial" panose="020B0604020202020204" pitchFamily="34" charset="0"/>
-                      </a:endParaRPr>
                     </a:p>
                   </a:txBody>
-                  <a:tcPr marL="57254" marR="57254" marT="0" marB="0" anchor="ctr"/>
+                  <a:tcPr>
+                    <a:solidFill>
+                      <a:srgbClr val="F5F5F5"/>
+                    </a:solidFill>
+                  </a:tcPr>
                 </a:tc>
-                <a:extLst>
-                  <a:ext uri="{0D108BD9-81ED-4DB2-BD59-A6C34878D82A}">
-                    <a16:rowId xmlns:a16="http://schemas.microsoft.com/office/drawing/2014/main" val="10007"/>
-                  </a:ext>
-                </a:extLst>
               </a:tr>
-              <a:tr h="338099">
-                <a:tc gridSpan="3">
+              <a:tr h="344658">
+                <a:tc>
                   <a:txBody>
                     <a:bodyPr/>
                     <a:lstStyle/>
                     <a:p>
-                      <a:pPr algn="just">
-                        <a:lnSpc>
-                          <a:spcPct val="150000"/>
-                        </a:lnSpc>
-                        <a:spcAft>
-                          <a:spcPts val="0"/>
-                        </a:spcAft>
-                      </a:pPr>
+                      <a:pPr algn="ctr"/>
                       <a:r>
-                        <a:rPr lang="es-BO" sz="1200" dirty="0">
-                          <a:effectLst/>
-                          <a:latin typeface="Arial" panose="020B0604020202020204" pitchFamily="34" charset="0"/>
-                          <a:cs typeface="Arial" panose="020B0604020202020204" pitchFamily="34" charset="0"/>
+                        <a:rPr sz="1100">
+                          <a:solidFill>
+                            <a:srgbClr val="212121"/>
+                          </a:solidFill>
+                          <a:latin typeface="Calibri"/>
                         </a:rPr>
-                        <a:t>SUBTOTAL</a:t>
+                        <a:t>6</a:t>
                       </a:r>
                     </a:p>
                   </a:txBody>
-                  <a:tcPr marL="57254" marR="57254" marT="0" marB="0" anchor="ctr"/>
-                </a:tc>
-                <a:tc hMerge="1">
-                  <a:txBody>
-                    <a:bodyPr/>
-                    <a:lstStyle/>
-                    <a:p>
-                      <a:endParaRPr lang="es-BO"/>
-                    </a:p>
-                  </a:txBody>
-                  <a:tcPr/>
-                </a:tc>
-                <a:tc hMerge="1">
-                  <a:txBody>
-                    <a:bodyPr/>
-                    <a:lstStyle/>
-                    <a:p>
-                      <a:endParaRPr lang="es-BO"/>
-                    </a:p>
-                  </a:txBody>
-                  <a:tcPr/>
+                  <a:tcPr>
+                    <a:solidFill>
+                      <a:srgbClr val="FFFFFF"/>
+                    </a:solidFill>
+                  </a:tcPr>
                 </a:tc>
                 <a:tc>
                   <a:txBody>
                     <a:bodyPr/>
                     <a:lstStyle/>
                     <a:p>
-                      <a:pPr algn="just">
-                        <a:lnSpc>
-                          <a:spcPct val="150000"/>
-                        </a:lnSpc>
-                        <a:spcAft>
-                          <a:spcPts val="0"/>
-                        </a:spcAft>
-                      </a:pPr>
+                      <a:pPr algn="ctr"/>
                       <a:r>
-                        <a:rPr lang="es-BO" sz="1200">
-                          <a:effectLst/>
-                          <a:latin typeface="Arial" panose="020B0604020202020204" pitchFamily="34" charset="0"/>
-                          <a:cs typeface="Arial" panose="020B0604020202020204" pitchFamily="34" charset="0"/>
+                        <a:rPr sz="1100">
+                          <a:solidFill>
+                            <a:srgbClr val="212121"/>
+                          </a:solidFill>
+                          <a:latin typeface="Calibri"/>
                         </a:rPr>
-                        <a:t>2843 Bs.</a:t>
-                      </a:r>
-                      <a:endParaRPr lang="es-BO" sz="1200">
-                        <a:effectLst/>
-                        <a:latin typeface="Arial" panose="020B0604020202020204" pitchFamily="34" charset="0"/>
-                        <a:ea typeface="Calibri" panose="020F0502020204030204" pitchFamily="34" charset="0"/>
-                        <a:cs typeface="Arial" panose="020B0604020202020204" pitchFamily="34" charset="0"/>
-                      </a:endParaRPr>
-                    </a:p>
-                  </a:txBody>
-                  <a:tcPr marL="57254" marR="57254" marT="0" marB="0" anchor="ctr"/>
-                </a:tc>
-                <a:extLst>
-                  <a:ext uri="{0D108BD9-81ED-4DB2-BD59-A6C34878D82A}">
-                    <a16:rowId xmlns:a16="http://schemas.microsoft.com/office/drawing/2014/main" val="10008"/>
-                  </a:ext>
-                </a:extLst>
-              </a:tr>
-              <a:tr h="467321">
-                <a:tc gridSpan="3">
-                  <a:txBody>
-                    <a:bodyPr/>
-                    <a:lstStyle/>
-                    <a:p>
-                      <a:pPr algn="just">
-                        <a:lnSpc>
-                          <a:spcPct val="150000"/>
-                        </a:lnSpc>
-                        <a:spcAft>
-                          <a:spcPts val="0"/>
-                        </a:spcAft>
-                      </a:pPr>
-                      <a:r>
-                        <a:rPr lang="es-BO" sz="1200" dirty="0">
-                          <a:effectLst/>
-                          <a:latin typeface="Arial" panose="020B0604020202020204" pitchFamily="34" charset="0"/>
-                          <a:cs typeface="Arial" panose="020B0604020202020204" pitchFamily="34" charset="0"/>
-                        </a:rPr>
-                        <a:t>TOTAL BOLIOVIANOS</a:t>
+                        <a:t>22 unid.</a:t>
                       </a:r>
                     </a:p>
                   </a:txBody>
-                  <a:tcPr marL="57254" marR="57254" marT="0" marB="0" anchor="ctr"/>
-                </a:tc>
-                <a:tc hMerge="1">
-                  <a:txBody>
-                    <a:bodyPr/>
-                    <a:lstStyle/>
-                    <a:p>
-                      <a:endParaRPr lang="es-BO"/>
-                    </a:p>
-                  </a:txBody>
-                  <a:tcPr/>
-                </a:tc>
-                <a:tc hMerge="1">
-                  <a:txBody>
-                    <a:bodyPr/>
-                    <a:lstStyle/>
-                    <a:p>
-                      <a:endParaRPr lang="es-BO"/>
-                    </a:p>
-                  </a:txBody>
-                  <a:tcPr/>
+                  <a:tcPr>
+                    <a:solidFill>
+                      <a:srgbClr val="FFFFFF"/>
+                    </a:solidFill>
+                  </a:tcPr>
                 </a:tc>
                 <a:tc>
                   <a:txBody>
                     <a:bodyPr/>
                     <a:lstStyle/>
                     <a:p>
-                      <a:pPr algn="just">
-                        <a:lnSpc>
-                          <a:spcPct val="150000"/>
-                        </a:lnSpc>
-                        <a:spcAft>
-                          <a:spcPts val="0"/>
-                        </a:spcAft>
-                      </a:pPr>
+                      <a:pPr algn="l"/>
                       <a:r>
-                        <a:rPr lang="es-BO" sz="1200" dirty="0">
-                          <a:effectLst/>
-                          <a:latin typeface="Arial" panose="020B0604020202020204" pitchFamily="34" charset="0"/>
-                          <a:cs typeface="Arial" panose="020B0604020202020204" pitchFamily="34" charset="0"/>
+                        <a:rPr sz="1100">
+                          <a:solidFill>
+                            <a:srgbClr val="212121"/>
+                          </a:solidFill>
+                          <a:latin typeface="Calibri"/>
                         </a:rPr>
-                        <a:t>2843 Bs.</a:t>
+                        <a:t>Cajas de hormigón 40×40×30 cm + llaves de respaldo</a:t>
                       </a:r>
-                      <a:endParaRPr lang="es-BO" sz="1200" dirty="0">
-                        <a:effectLst/>
-                        <a:latin typeface="Arial" panose="020B0604020202020204" pitchFamily="34" charset="0"/>
-                        <a:ea typeface="Calibri" panose="020F0502020204030204" pitchFamily="34" charset="0"/>
-                        <a:cs typeface="Arial" panose="020B0604020202020204" pitchFamily="34" charset="0"/>
-                      </a:endParaRPr>
                     </a:p>
                   </a:txBody>
-                  <a:tcPr marL="57254" marR="57254" marT="0" marB="0" anchor="ctr"/>
+                  <a:tcPr>
+                    <a:solidFill>
+                      <a:srgbClr val="FFFFFF"/>
+                    </a:solidFill>
+                  </a:tcPr>
                 </a:tc>
-                <a:extLst>
-                  <a:ext uri="{0D108BD9-81ED-4DB2-BD59-A6C34878D82A}">
-                    <a16:rowId xmlns:a16="http://schemas.microsoft.com/office/drawing/2014/main" val="10009"/>
-                  </a:ext>
-                </a:extLst>
+                <a:tc>
+                  <a:txBody>
+                    <a:bodyPr/>
+                    <a:lstStyle/>
+                    <a:p>
+                      <a:pPr algn="r"/>
+                      <a:r>
+                        <a:rPr sz="1100">
+                          <a:solidFill>
+                            <a:srgbClr val="212121"/>
+                          </a:solidFill>
+                          <a:latin typeface="Calibri"/>
+                        </a:rPr>
+                        <a:t>—</a:t>
+                      </a:r>
+                    </a:p>
+                  </a:txBody>
+                  <a:tcPr>
+                    <a:solidFill>
+                      <a:srgbClr val="FFFFFF"/>
+                    </a:solidFill>
+                  </a:tcPr>
+                </a:tc>
+                <a:tc>
+                  <a:txBody>
+                    <a:bodyPr/>
+                    <a:lstStyle/>
+                    <a:p>
+                      <a:pPr algn="r"/>
+                      <a:r>
+                        <a:rPr sz="1100">
+                          <a:solidFill>
+                            <a:srgbClr val="212121"/>
+                          </a:solidFill>
+                          <a:latin typeface="Calibri"/>
+                        </a:rPr>
+                        <a:t>4.510</a:t>
+                      </a:r>
+                    </a:p>
+                  </a:txBody>
+                  <a:tcPr>
+                    <a:solidFill>
+                      <a:srgbClr val="FFFFFF"/>
+                    </a:solidFill>
+                  </a:tcPr>
+                </a:tc>
+              </a:tr>
+              <a:tr h="344658">
+                <a:tc>
+                  <a:txBody>
+                    <a:bodyPr/>
+                    <a:lstStyle/>
+                    <a:p>
+                      <a:pPr algn="ctr"/>
+                      <a:r>
+                        <a:rPr sz="1100">
+                          <a:solidFill>
+                            <a:srgbClr val="212121"/>
+                          </a:solidFill>
+                          <a:latin typeface="Calibri"/>
+                        </a:rPr>
+                        <a:t>7</a:t>
+                      </a:r>
+                    </a:p>
+                  </a:txBody>
+                  <a:tcPr>
+                    <a:solidFill>
+                      <a:srgbClr val="F5F5F5"/>
+                    </a:solidFill>
+                  </a:tcPr>
+                </a:tc>
+                <a:tc>
+                  <a:txBody>
+                    <a:bodyPr/>
+                    <a:lstStyle/>
+                    <a:p>
+                      <a:pPr algn="ctr"/>
+                      <a:r>
+                        <a:rPr sz="1100">
+                          <a:solidFill>
+                            <a:srgbClr val="212121"/>
+                          </a:solidFill>
+                          <a:latin typeface="Calibri"/>
+                        </a:rPr>
+                        <a:t>22 unid.</a:t>
+                      </a:r>
+                    </a:p>
+                  </a:txBody>
+                  <a:tcPr>
+                    <a:solidFill>
+                      <a:srgbClr val="F5F5F5"/>
+                    </a:solidFill>
+                  </a:tcPr>
+                </a:tc>
+                <a:tc>
+                  <a:txBody>
+                    <a:bodyPr/>
+                    <a:lstStyle/>
+                    <a:p>
+                      <a:pPr algn="l"/>
+                      <a:r>
+                        <a:rPr sz="1100">
+                          <a:solidFill>
+                            <a:srgbClr val="212121"/>
+                          </a:solidFill>
+                          <a:latin typeface="Calibri"/>
+                        </a:rPr>
+                        <a:t>Baterías 9V (repuestos anuales)</a:t>
+                      </a:r>
+                    </a:p>
+                  </a:txBody>
+                  <a:tcPr>
+                    <a:solidFill>
+                      <a:srgbClr val="F5F5F5"/>
+                    </a:solidFill>
+                  </a:tcPr>
+                </a:tc>
+                <a:tc>
+                  <a:txBody>
+                    <a:bodyPr/>
+                    <a:lstStyle/>
+                    <a:p>
+                      <a:pPr algn="r"/>
+                      <a:r>
+                        <a:rPr sz="1100">
+                          <a:solidFill>
+                            <a:srgbClr val="212121"/>
+                          </a:solidFill>
+                          <a:latin typeface="Calibri"/>
+                        </a:rPr>
+                        <a:t>25</a:t>
+                      </a:r>
+                    </a:p>
+                  </a:txBody>
+                  <a:tcPr>
+                    <a:solidFill>
+                      <a:srgbClr val="F5F5F5"/>
+                    </a:solidFill>
+                  </a:tcPr>
+                </a:tc>
+                <a:tc>
+                  <a:txBody>
+                    <a:bodyPr/>
+                    <a:lstStyle/>
+                    <a:p>
+                      <a:pPr algn="r"/>
+                      <a:r>
+                        <a:rPr sz="1100">
+                          <a:solidFill>
+                            <a:srgbClr val="212121"/>
+                          </a:solidFill>
+                          <a:latin typeface="Calibri"/>
+                        </a:rPr>
+                        <a:t>550</a:t>
+                      </a:r>
+                    </a:p>
+                  </a:txBody>
+                  <a:tcPr>
+                    <a:solidFill>
+                      <a:srgbClr val="F5F5F5"/>
+                    </a:solidFill>
+                  </a:tcPr>
+                </a:tc>
+              </a:tr>
+              <a:tr h="344658">
+                <a:tc>
+                  <a:txBody>
+                    <a:bodyPr/>
+                    <a:lstStyle/>
+                    <a:p>
+                      <a:pPr algn="ctr"/>
+                      <a:r>
+                        <a:rPr sz="1100">
+                          <a:solidFill>
+                            <a:srgbClr val="212121"/>
+                          </a:solidFill>
+                          <a:latin typeface="Calibri"/>
+                        </a:rPr>
+                        <a:t>8</a:t>
+                      </a:r>
+                    </a:p>
+                  </a:txBody>
+                  <a:tcPr>
+                    <a:solidFill>
+                      <a:srgbClr val="FFFFFF"/>
+                    </a:solidFill>
+                  </a:tcPr>
+                </a:tc>
+                <a:tc>
+                  <a:txBody>
+                    <a:bodyPr/>
+                    <a:lstStyle/>
+                    <a:p>
+                      <a:pPr algn="ctr"/>
+                      <a:r>
+                        <a:rPr sz="1100">
+                          <a:solidFill>
+                            <a:srgbClr val="212121"/>
+                          </a:solidFill>
+                          <a:latin typeface="Calibri"/>
+                        </a:rPr>
+                        <a:t>Free</a:t>
+                      </a:r>
+                    </a:p>
+                  </a:txBody>
+                  <a:tcPr>
+                    <a:solidFill>
+                      <a:srgbClr val="FFFFFF"/>
+                    </a:solidFill>
+                  </a:tcPr>
+                </a:tc>
+                <a:tc>
+                  <a:txBody>
+                    <a:bodyPr/>
+                    <a:lstStyle/>
+                    <a:p>
+                      <a:pPr algn="l"/>
+                      <a:r>
+                        <a:rPr sz="1100">
+                          <a:solidFill>
+                            <a:srgbClr val="212121"/>
+                          </a:solidFill>
+                          <a:latin typeface="Calibri"/>
+                        </a:rPr>
+                        <a:t>Supabase + Lovable (plan gratuito)</a:t>
+                      </a:r>
+                    </a:p>
+                  </a:txBody>
+                  <a:tcPr>
+                    <a:solidFill>
+                      <a:srgbClr val="FFFFFF"/>
+                    </a:solidFill>
+                  </a:tcPr>
+                </a:tc>
+                <a:tc>
+                  <a:txBody>
+                    <a:bodyPr/>
+                    <a:lstStyle/>
+                    <a:p>
+                      <a:pPr algn="r"/>
+                      <a:r>
+                        <a:rPr sz="1100">
+                          <a:solidFill>
+                            <a:srgbClr val="212121"/>
+                          </a:solidFill>
+                          <a:latin typeface="Calibri"/>
+                        </a:rPr>
+                        <a:t>0</a:t>
+                      </a:r>
+                    </a:p>
+                  </a:txBody>
+                  <a:tcPr>
+                    <a:solidFill>
+                      <a:srgbClr val="FFFFFF"/>
+                    </a:solidFill>
+                  </a:tcPr>
+                </a:tc>
+                <a:tc>
+                  <a:txBody>
+                    <a:bodyPr/>
+                    <a:lstStyle/>
+                    <a:p>
+                      <a:pPr algn="r"/>
+                      <a:r>
+                        <a:rPr sz="1100">
+                          <a:solidFill>
+                            <a:srgbClr val="212121"/>
+                          </a:solidFill>
+                          <a:latin typeface="Calibri"/>
+                        </a:rPr>
+                        <a:t>0</a:t>
+                      </a:r>
+                    </a:p>
+                  </a:txBody>
+                  <a:tcPr>
+                    <a:solidFill>
+                      <a:srgbClr val="FFFFFF"/>
+                    </a:solidFill>
+                  </a:tcPr>
+                </a:tc>
+              </a:tr>
+              <a:tr h="344658">
+                <a:tc>
+                  <a:txBody>
+                    <a:bodyPr/>
+                    <a:lstStyle/>
+                    <a:p>
+                      <a:pPr algn="ctr"/>
+                      <a:r>
+                        <a:rPr sz="1100">
+                          <a:solidFill>
+                            <a:srgbClr val="212121"/>
+                          </a:solidFill>
+                          <a:latin typeface="Calibri"/>
+                        </a:rPr>
+                        <a:t>9</a:t>
+                      </a:r>
+                    </a:p>
+                  </a:txBody>
+                  <a:tcPr>
+                    <a:solidFill>
+                      <a:srgbClr val="F5F5F5"/>
+                    </a:solidFill>
+                  </a:tcPr>
+                </a:tc>
+                <a:tc>
+                  <a:txBody>
+                    <a:bodyPr/>
+                    <a:lstStyle/>
+                    <a:p>
+                      <a:pPr algn="ctr"/>
+                      <a:r>
+                        <a:rPr sz="1100">
+                          <a:solidFill>
+                            <a:srgbClr val="212121"/>
+                          </a:solidFill>
+                          <a:latin typeface="Calibri"/>
+                        </a:rPr>
+                        <a:t>60 hrs</a:t>
+                      </a:r>
+                    </a:p>
+                  </a:txBody>
+                  <a:tcPr>
+                    <a:solidFill>
+                      <a:srgbClr val="F5F5F5"/>
+                    </a:solidFill>
+                  </a:tcPr>
+                </a:tc>
+                <a:tc>
+                  <a:txBody>
+                    <a:bodyPr/>
+                    <a:lstStyle/>
+                    <a:p>
+                      <a:pPr algn="l"/>
+                      <a:r>
+                        <a:rPr sz="1100">
+                          <a:solidFill>
+                            <a:srgbClr val="212121"/>
+                          </a:solidFill>
+                          <a:latin typeface="Calibri"/>
+                        </a:rPr>
+                        <a:t>Desarrollo de plataforma web SARQUE</a:t>
+                      </a:r>
+                    </a:p>
+                  </a:txBody>
+                  <a:tcPr>
+                    <a:solidFill>
+                      <a:srgbClr val="F5F5F5"/>
+                    </a:solidFill>
+                  </a:tcPr>
+                </a:tc>
+                <a:tc>
+                  <a:txBody>
+                    <a:bodyPr/>
+                    <a:lstStyle/>
+                    <a:p>
+                      <a:pPr algn="r"/>
+                      <a:r>
+                        <a:rPr sz="1100">
+                          <a:solidFill>
+                            <a:srgbClr val="212121"/>
+                          </a:solidFill>
+                          <a:latin typeface="Calibri"/>
+                        </a:rPr>
+                        <a:t>35</a:t>
+                      </a:r>
+                    </a:p>
+                  </a:txBody>
+                  <a:tcPr>
+                    <a:solidFill>
+                      <a:srgbClr val="F5F5F5"/>
+                    </a:solidFill>
+                  </a:tcPr>
+                </a:tc>
+                <a:tc>
+                  <a:txBody>
+                    <a:bodyPr/>
+                    <a:lstStyle/>
+                    <a:p>
+                      <a:pPr algn="r"/>
+                      <a:r>
+                        <a:rPr sz="1100">
+                          <a:solidFill>
+                            <a:srgbClr val="212121"/>
+                          </a:solidFill>
+                          <a:latin typeface="Calibri"/>
+                        </a:rPr>
+                        <a:t>2.100</a:t>
+                      </a:r>
+                    </a:p>
+                  </a:txBody>
+                  <a:tcPr>
+                    <a:solidFill>
+                      <a:srgbClr val="F5F5F5"/>
+                    </a:solidFill>
+                  </a:tcPr>
+                </a:tc>
+              </a:tr>
+              <a:tr h="344658">
+                <a:tc>
+                  <a:txBody>
+                    <a:bodyPr/>
+                    <a:lstStyle/>
+                    <a:p>
+                      <a:pPr algn="ctr"/>
+                      <a:r>
+                        <a:rPr sz="1100">
+                          <a:solidFill>
+                            <a:srgbClr val="212121"/>
+                          </a:solidFill>
+                          <a:latin typeface="Calibri"/>
+                        </a:rPr>
+                        <a:t>10</a:t>
+                      </a:r>
+                    </a:p>
+                  </a:txBody>
+                  <a:tcPr>
+                    <a:solidFill>
+                      <a:srgbClr val="FFFFFF"/>
+                    </a:solidFill>
+                  </a:tcPr>
+                </a:tc>
+                <a:tc>
+                  <a:txBody>
+                    <a:bodyPr/>
+                    <a:lstStyle/>
+                    <a:p>
+                      <a:pPr algn="ctr"/>
+                      <a:r>
+                        <a:rPr sz="1100">
+                          <a:solidFill>
+                            <a:srgbClr val="212121"/>
+                          </a:solidFill>
+                          <a:latin typeface="Calibri"/>
+                        </a:rPr>
+                        <a:t>120 hrs</a:t>
+                      </a:r>
+                    </a:p>
+                  </a:txBody>
+                  <a:tcPr>
+                    <a:solidFill>
+                      <a:srgbClr val="FFFFFF"/>
+                    </a:solidFill>
+                  </a:tcPr>
+                </a:tc>
+                <a:tc>
+                  <a:txBody>
+                    <a:bodyPr/>
+                    <a:lstStyle/>
+                    <a:p>
+                      <a:pPr algn="l"/>
+                      <a:r>
+                        <a:rPr sz="1100">
+                          <a:solidFill>
+                            <a:srgbClr val="212121"/>
+                          </a:solidFill>
+                          <a:latin typeface="Calibri"/>
+                        </a:rPr>
+                        <a:t>Mano de obra: excavación e instalación</a:t>
+                      </a:r>
+                    </a:p>
+                  </a:txBody>
+                  <a:tcPr>
+                    <a:solidFill>
+                      <a:srgbClr val="FFFFFF"/>
+                    </a:solidFill>
+                  </a:tcPr>
+                </a:tc>
+                <a:tc>
+                  <a:txBody>
+                    <a:bodyPr/>
+                    <a:lstStyle/>
+                    <a:p>
+                      <a:pPr algn="r"/>
+                      <a:r>
+                        <a:rPr sz="1100">
+                          <a:solidFill>
+                            <a:srgbClr val="212121"/>
+                          </a:solidFill>
+                          <a:latin typeface="Calibri"/>
+                        </a:rPr>
+                        <a:t>50</a:t>
+                      </a:r>
+                    </a:p>
+                  </a:txBody>
+                  <a:tcPr>
+                    <a:solidFill>
+                      <a:srgbClr val="FFFFFF"/>
+                    </a:solidFill>
+                  </a:tcPr>
+                </a:tc>
+                <a:tc>
+                  <a:txBody>
+                    <a:bodyPr/>
+                    <a:lstStyle/>
+                    <a:p>
+                      <a:pPr algn="r"/>
+                      <a:r>
+                        <a:rPr sz="1100">
+                          <a:solidFill>
+                            <a:srgbClr val="212121"/>
+                          </a:solidFill>
+                          <a:latin typeface="Calibri"/>
+                        </a:rPr>
+                        <a:t>6.000</a:t>
+                      </a:r>
+                    </a:p>
+                  </a:txBody>
+                  <a:tcPr>
+                    <a:solidFill>
+                      <a:srgbClr val="FFFFFF"/>
+                    </a:solidFill>
+                  </a:tcPr>
+                </a:tc>
+              </a:tr>
+              <a:tr h="344658">
+                <a:tc>
+                  <a:txBody>
+                    <a:bodyPr/>
+                    <a:lstStyle/>
+                    <a:p>
+                      <a:pPr algn="ctr"/>
+                      <a:r>
+                        <a:rPr sz="1100">
+                          <a:solidFill>
+                            <a:srgbClr val="212121"/>
+                          </a:solidFill>
+                          <a:latin typeface="Calibri"/>
+                        </a:rPr>
+                        <a:t>11</a:t>
+                      </a:r>
+                    </a:p>
+                  </a:txBody>
+                  <a:tcPr>
+                    <a:solidFill>
+                      <a:srgbClr val="F5F5F5"/>
+                    </a:solidFill>
+                  </a:tcPr>
+                </a:tc>
+                <a:tc>
+                  <a:txBody>
+                    <a:bodyPr/>
+                    <a:lstStyle/>
+                    <a:p>
+                      <a:pPr algn="ctr"/>
+                      <a:r>
+                        <a:rPr sz="1100">
+                          <a:solidFill>
+                            <a:srgbClr val="212121"/>
+                          </a:solidFill>
+                          <a:latin typeface="Calibri"/>
+                        </a:rPr>
+                        <a:t>—</a:t>
+                      </a:r>
+                    </a:p>
+                  </a:txBody>
+                  <a:tcPr>
+                    <a:solidFill>
+                      <a:srgbClr val="F5F5F5"/>
+                    </a:solidFill>
+                  </a:tcPr>
+                </a:tc>
+                <a:tc>
+                  <a:txBody>
+                    <a:bodyPr/>
+                    <a:lstStyle/>
+                    <a:p>
+                      <a:pPr algn="l"/>
+                      <a:r>
+                        <a:rPr sz="1100">
+                          <a:solidFill>
+                            <a:srgbClr val="212121"/>
+                          </a:solidFill>
+                          <a:latin typeface="Calibri"/>
+                        </a:rPr>
+                        <a:t>Documentación, impresiones y gastos varios</a:t>
+                      </a:r>
+                    </a:p>
+                  </a:txBody>
+                  <a:tcPr>
+                    <a:solidFill>
+                      <a:srgbClr val="F5F5F5"/>
+                    </a:solidFill>
+                  </a:tcPr>
+                </a:tc>
+                <a:tc>
+                  <a:txBody>
+                    <a:bodyPr/>
+                    <a:lstStyle/>
+                    <a:p>
+                      <a:pPr algn="r"/>
+                      <a:r>
+                        <a:rPr sz="1100">
+                          <a:solidFill>
+                            <a:srgbClr val="212121"/>
+                          </a:solidFill>
+                          <a:latin typeface="Calibri"/>
+                        </a:rPr>
+                        <a:t>—</a:t>
+                      </a:r>
+                    </a:p>
+                  </a:txBody>
+                  <a:tcPr>
+                    <a:solidFill>
+                      <a:srgbClr val="F5F5F5"/>
+                    </a:solidFill>
+                  </a:tcPr>
+                </a:tc>
+                <a:tc>
+                  <a:txBody>
+                    <a:bodyPr/>
+                    <a:lstStyle/>
+                    <a:p>
+                      <a:pPr algn="r"/>
+                      <a:r>
+                        <a:rPr sz="1100">
+                          <a:solidFill>
+                            <a:srgbClr val="212121"/>
+                          </a:solidFill>
+                          <a:latin typeface="Calibri"/>
+                        </a:rPr>
+                        <a:t>1.340</a:t>
+                      </a:r>
+                    </a:p>
+                  </a:txBody>
+                  <a:tcPr>
+                    <a:solidFill>
+                      <a:srgbClr val="F5F5F5"/>
+                    </a:solidFill>
+                  </a:tcPr>
+                </a:tc>
+              </a:tr>
+              <a:tr h="344664">
+                <a:tc>
+                  <a:txBody>
+                    <a:bodyPr/>
+                    <a:lstStyle/>
+                    <a:p>
+                      <a:pPr algn="ctr"/>
+                      <a:r>
+                        <a:rPr sz="1300" b="1">
+                          <a:solidFill>
+                            <a:srgbClr val="FFFFFF"/>
+                          </a:solidFill>
+                          <a:latin typeface="Calibri"/>
+                        </a:rPr>
+                        <a:t/>
+                      </a:r>
+                    </a:p>
+                  </a:txBody>
+                  <a:tcPr>
+                    <a:solidFill>
+                      <a:srgbClr val="2E7D32"/>
+                    </a:solidFill>
+                  </a:tcPr>
+                </a:tc>
+                <a:tc>
+                  <a:txBody>
+                    <a:bodyPr/>
+                    <a:lstStyle/>
+                    <a:p>
+                      <a:pPr algn="ctr"/>
+                      <a:r>
+                        <a:rPr sz="1300" b="1">
+                          <a:solidFill>
+                            <a:srgbClr val="FFFFFF"/>
+                          </a:solidFill>
+                          <a:latin typeface="Calibri"/>
+                        </a:rPr>
+                        <a:t/>
+                      </a:r>
+                    </a:p>
+                  </a:txBody>
+                  <a:tcPr>
+                    <a:solidFill>
+                      <a:srgbClr val="2E7D32"/>
+                    </a:solidFill>
+                  </a:tcPr>
+                </a:tc>
+                <a:tc>
+                  <a:txBody>
+                    <a:bodyPr/>
+                    <a:lstStyle/>
+                    <a:p>
+                      <a:pPr algn="r"/>
+                      <a:r>
+                        <a:rPr sz="1300" b="1">
+                          <a:solidFill>
+                            <a:srgbClr val="FFFFFF"/>
+                          </a:solidFill>
+                          <a:latin typeface="Calibri"/>
+                        </a:rPr>
+                        <a:t>TOTAL GENERAL</a:t>
+                      </a:r>
+                    </a:p>
+                  </a:txBody>
+                  <a:tcPr>
+                    <a:solidFill>
+                      <a:srgbClr val="2E7D32"/>
+                    </a:solidFill>
+                  </a:tcPr>
+                </a:tc>
+                <a:tc>
+                  <a:txBody>
+                    <a:bodyPr/>
+                    <a:lstStyle/>
+                    <a:p>
+                      <a:pPr algn="ctr"/>
+                      <a:r>
+                        <a:rPr sz="1300" b="1">
+                          <a:solidFill>
+                            <a:srgbClr val="FFFFFF"/>
+                          </a:solidFill>
+                          <a:latin typeface="Calibri"/>
+                        </a:rPr>
+                        <a:t>Bs.</a:t>
+                      </a:r>
+                    </a:p>
+                  </a:txBody>
+                  <a:tcPr>
+                    <a:solidFill>
+                      <a:srgbClr val="2E7D32"/>
+                    </a:solidFill>
+                  </a:tcPr>
+                </a:tc>
+                <a:tc>
+                  <a:txBody>
+                    <a:bodyPr/>
+                    <a:lstStyle/>
+                    <a:p>
+                      <a:pPr algn="r"/>
+                      <a:r>
+                        <a:rPr sz="1300" b="1">
+                          <a:solidFill>
+                            <a:srgbClr val="FFFFFF"/>
+                          </a:solidFill>
+                          <a:latin typeface="Calibri"/>
+                        </a:rPr>
+                        <a:t>51.220</a:t>
+                      </a:r>
+                    </a:p>
+                  </a:txBody>
+                  <a:tcPr>
+                    <a:solidFill>
+                      <a:srgbClr val="2E7D32"/>
+                    </a:solidFill>
+                  </a:tcPr>
+                </a:tc>
               </a:tr>
             </a:tbl>
           </a:graphicData>
@@ -8007,37 +7860,6 @@
           <a:chExt cx="0" cy="0"/>
         </a:xfrm>
       </p:grpSpPr>
-      <p:pic>
-        <p:nvPicPr>
-          <p:cNvPr id="9" name="Imagen 8"/>
-          <p:cNvPicPr>
-            <a:picLocks noChangeAspect="1"/>
-          </p:cNvPicPr>
-          <p:nvPr/>
-        </p:nvPicPr>
-        <p:blipFill>
-          <a:blip r:embed="rId2">
-            <a:lum bright="70000" contrast="-70000"/>
-            <a:extLst>
-              <a:ext uri="{28A0092B-C50C-407E-A947-70E740481C1C}">
-                <a14:useLocalDpi xmlns:a14="http://schemas.microsoft.com/office/drawing/2010/main" val="0"/>
-              </a:ext>
-            </a:extLst>
-          </a:blip>
-          <a:stretch>
-            <a:fillRect/>
-          </a:stretch>
-        </p:blipFill>
-        <p:spPr>
-          <a:xfrm>
-            <a:off x="3626272" y="1888268"/>
-            <a:ext cx="3786310" cy="4006096"/>
-          </a:xfrm>
-          <a:prstGeom prst="rect">
-            <a:avLst/>
-          </a:prstGeom>
-        </p:spPr>
-      </p:pic>
       <p:sp>
         <p:nvSpPr>
           <p:cNvPr id="2" name="Rectángulo 1"/>
@@ -8130,8 +7952,8 @@
         </p:nvSpPr>
         <p:spPr>
           <a:xfrm>
-            <a:off x="0" y="1340839"/>
-            <a:ext cx="6720395" cy="588236"/>
+            <a:off x="457200" y="1280160"/>
+            <a:ext cx="11277600" cy="640080"/>
           </a:xfrm>
           <a:prstGeom prst="rect">
             <a:avLst/>
@@ -8166,7 +7988,7 @@
             </a:lvl1pPr>
           </a:lstStyle>
           <a:p>
-            <a:pPr algn="l"/>
+            <a:pPr algn="ctr"/>
             <a:r>
               <a:rPr lang="es-BO" sz="3600" u="sng" dirty="0">
                 <a:solidFill>
@@ -8239,36 +8061,45 @@
           </a:prstGeom>
         </p:spPr>
       </p:pic>
-      <p:pic>
-        <p:nvPicPr>
-          <p:cNvPr id="3" name="Imagen 2" descr="Recorte de pantalla"/>
-          <p:cNvPicPr>
-            <a:picLocks noChangeAspect="1"/>
-          </p:cNvPicPr>
+      <p:sp>
+        <p:nvSpPr>
+          <p:cNvPr id="9" name="TextBox 8"/>
+          <p:cNvSpPr txBox="1"/>
           <p:nvPr/>
-        </p:nvPicPr>
-        <p:blipFill>
-          <a:blip r:embed="rId5">
-            <a:extLst>
-              <a:ext uri="{28A0092B-C50C-407E-A947-70E740481C1C}">
-                <a14:useLocalDpi xmlns:a14="http://schemas.microsoft.com/office/drawing/2010/main" val="0"/>
-              </a:ext>
-            </a:extLst>
-          </a:blip>
-          <a:stretch>
-            <a:fillRect/>
-          </a:stretch>
-        </p:blipFill>
-        <p:spPr>
-          <a:xfrm>
-            <a:off x="0" y="1929075"/>
-            <a:ext cx="10559182" cy="4512718"/>
+        </p:nvSpPr>
+        <p:spPr>
+          <a:xfrm>
+            <a:off x="548640" y="2103120"/>
+            <a:ext cx="11064240" cy="4297680"/>
           </a:xfrm>
           <a:prstGeom prst="rect">
             <a:avLst/>
           </a:prstGeom>
-        </p:spPr>
-      </p:pic>
+          <a:noFill/>
+        </p:spPr>
+        <p:txBody>
+          <a:bodyPr wrap="square">
+            <a:spAutoFit/>
+          </a:bodyPr>
+          <a:lstStyle/>
+          <a:p>
+            <a:pPr algn="just"/>
+            <a:r>
+              <a:rPr sz="1600">
+                <a:solidFill>
+                  <a:srgbClr val="212121"/>
+                </a:solidFill>
+                <a:latin typeface="Calibri"/>
+              </a:rPr>
+              <a:t>El Parque Ecoturístico Quinta Estación, de 5 hectáreas, opera actualmente con riego manual mediante 41 llaves de paso distribuidas en el predio. Este sistema manual genera múltiples problemas operativos:
+• Tiempo improductivo de mínimo 30 minutos diarios en desplazamientos del personal (6 jardineros) entre las llaves de paso.
+• Fugas en cañerías por olvido de cierre de llaves al finalizar el turno de riego, lo que desperdicia hasta 28.800 litros por incidente.
+• Sectores sin riego por olvido de apertura de llaves, comprometiendo la salud de las especies vegetales.
+• Cronograma semanal complejo mantenido únicamente en papel, vulnerable a pérdida y desactualización, sin documentación digital del sistema.</a:t>
+            </a:r>
+          </a:p>
+        </p:txBody>
+      </p:sp>
     </p:spTree>
     <p:extLst>
       <p:ext uri="{BB962C8B-B14F-4D97-AF65-F5344CB8AC3E}">
@@ -8299,37 +8130,6 @@
           <a:chExt cx="0" cy="0"/>
         </a:xfrm>
       </p:grpSpPr>
-      <p:pic>
-        <p:nvPicPr>
-          <p:cNvPr id="11" name="Imagen 10"/>
-          <p:cNvPicPr>
-            <a:picLocks noChangeAspect="1"/>
-          </p:cNvPicPr>
-          <p:nvPr/>
-        </p:nvPicPr>
-        <p:blipFill>
-          <a:blip r:embed="rId2">
-            <a:lum bright="70000" contrast="-70000"/>
-            <a:extLst>
-              <a:ext uri="{28A0092B-C50C-407E-A947-70E740481C1C}">
-                <a14:useLocalDpi xmlns:a14="http://schemas.microsoft.com/office/drawing/2010/main" val="0"/>
-              </a:ext>
-            </a:extLst>
-          </a:blip>
-          <a:stretch>
-            <a:fillRect/>
-          </a:stretch>
-        </p:blipFill>
-        <p:spPr>
-          <a:xfrm>
-            <a:off x="3626272" y="1888268"/>
-            <a:ext cx="3786310" cy="4006096"/>
-          </a:xfrm>
-          <a:prstGeom prst="rect">
-            <a:avLst/>
-          </a:prstGeom>
-        </p:spPr>
-      </p:pic>
       <p:sp>
         <p:nvSpPr>
           <p:cNvPr id="2" name="Rectángulo 1"/>
@@ -8422,8 +8222,8 @@
         </p:nvSpPr>
         <p:spPr>
           <a:xfrm>
-            <a:off x="316402" y="1426508"/>
-            <a:ext cx="3309870" cy="588236"/>
+            <a:off x="457200" y="1280160"/>
+            <a:ext cx="11277600" cy="640080"/>
           </a:xfrm>
           <a:prstGeom prst="rect">
             <a:avLst/>
@@ -8458,7 +8258,7 @@
             </a:lvl1pPr>
           </a:lstStyle>
           <a:p>
-            <a:pPr algn="l"/>
+            <a:pPr algn="ctr"/>
             <a:r>
               <a:rPr lang="es-BO" sz="3600" u="sng" dirty="0">
                 <a:solidFill>
@@ -8479,8 +8279,8 @@
         </p:nvSpPr>
         <p:spPr>
           <a:xfrm>
-            <a:off x="605307" y="1900911"/>
-            <a:ext cx="10004422" cy="958660"/>
+            <a:off x="548640" y="1920240"/>
+            <a:ext cx="11064240" cy="1097280"/>
           </a:xfrm>
           <a:prstGeom prst="rect">
             <a:avLst/>
@@ -8499,7 +8299,7 @@
               </a:lnSpc>
             </a:pPr>
             <a:r>
-              <a:rPr lang="es-ES" sz="2000" dirty="0">
+              <a:rPr lang="es-ES" sz="1300" dirty="0">
                 <a:latin typeface="Arial" panose="020B0604020202020204" pitchFamily="34" charset="0"/>
                 <a:cs typeface="Arial" panose="020B0604020202020204" pitchFamily="34" charset="0"/>
               </a:rPr>
@@ -8520,8 +8320,8 @@
         </p:nvSpPr>
         <p:spPr>
           <a:xfrm>
-            <a:off x="605307" y="2949238"/>
-            <a:ext cx="10004422" cy="3908762"/>
+            <a:off x="548640" y="3108960"/>
+            <a:ext cx="11064240" cy="3474720"/>
           </a:xfrm>
           <a:prstGeom prst="rect">
             <a:avLst/>
@@ -8534,8 +8334,9 @@
           </a:bodyPr>
           <a:lstStyle/>
           <a:p>
-            <a:r>
-              <a:rPr lang="es-ES" sz="2000" b="1" dirty="0">
+            <a:pPr algn="just"/>
+            <a:r>
+              <a:rPr lang="es-ES" sz="1200" b="1" dirty="0">
                 <a:latin typeface="Arial" panose="020B0604020202020204" pitchFamily="34" charset="0"/>
                 <a:cs typeface="Arial" panose="020B0604020202020204" pitchFamily="34" charset="0"/>
               </a:rPr>
@@ -8547,7 +8348,7 @@
             </a:endParaRPr>
           </a:p>
           <a:p>
-            <a:pPr marL="285750" lvl="0" indent="-285750">
+            <a:pPr marL="285750" lvl="0" indent="-285750" algn="just">
               <a:lnSpc>
                 <a:spcPct val="150000"/>
               </a:lnSpc>
@@ -8555,7 +8356,7 @@
               <a:buChar char="•"/>
             </a:pPr>
             <a:r>
-              <a:rPr lang="es-ES" sz="2000" dirty="0">
+              <a:rPr lang="es-ES" sz="1200" dirty="0">
                 <a:latin typeface="Arial" panose="020B0604020202020204" pitchFamily="34" charset="0"/>
                 <a:cs typeface="Arial" panose="020B0604020202020204" pitchFamily="34" charset="0"/>
               </a:rPr>
@@ -8567,7 +8368,7 @@
             </a:endParaRPr>
           </a:p>
           <a:p>
-            <a:pPr marL="285750" lvl="0" indent="-285750">
+            <a:pPr marL="285750" lvl="0" indent="-285750" algn="just">
               <a:lnSpc>
                 <a:spcPct val="150000"/>
               </a:lnSpc>
@@ -8575,7 +8376,7 @@
               <a:buChar char="•"/>
             </a:pPr>
             <a:r>
-              <a:rPr lang="es-ES" sz="2000" dirty="0">
+              <a:rPr lang="es-ES" sz="1200" dirty="0">
                 <a:latin typeface="Arial" panose="020B0604020202020204" pitchFamily="34" charset="0"/>
                 <a:cs typeface="Arial" panose="020B0604020202020204" pitchFamily="34" charset="0"/>
               </a:rPr>
@@ -8587,7 +8388,7 @@
             </a:endParaRPr>
           </a:p>
           <a:p>
-            <a:pPr marL="285750" lvl="0" indent="-285750">
+            <a:pPr marL="285750" lvl="0" indent="-285750" algn="just">
               <a:lnSpc>
                 <a:spcPct val="150000"/>
               </a:lnSpc>
@@ -8595,7 +8396,7 @@
               <a:buChar char="•"/>
             </a:pPr>
             <a:r>
-              <a:rPr lang="es-ES" sz="2000" dirty="0">
+              <a:rPr lang="es-ES" sz="1200" dirty="0">
                 <a:latin typeface="Arial" panose="020B0604020202020204" pitchFamily="34" charset="0"/>
                 <a:cs typeface="Arial" panose="020B0604020202020204" pitchFamily="34" charset="0"/>
               </a:rPr>
@@ -8607,7 +8408,7 @@
             </a:endParaRPr>
           </a:p>
           <a:p>
-            <a:pPr marL="285750" lvl="0" indent="-285750">
+            <a:pPr marL="285750" lvl="0" indent="-285750" algn="just">
               <a:lnSpc>
                 <a:spcPct val="150000"/>
               </a:lnSpc>
@@ -8615,21 +8416,21 @@
               <a:buChar char="•"/>
             </a:pPr>
             <a:r>
-              <a:rPr lang="es-ES" sz="2000" dirty="0">
+              <a:rPr lang="es-ES" sz="1200" dirty="0">
                 <a:latin typeface="Arial" panose="020B0604020202020204" pitchFamily="34" charset="0"/>
                 <a:cs typeface="Arial" panose="020B0604020202020204" pitchFamily="34" charset="0"/>
               </a:rPr>
               <a:t>Programación de los 6 controladores BL-KR mediante la app oficial K-RainBL, </a:t>
             </a:r>
             <a:r>
-              <a:rPr lang="es-ES" sz="2000" dirty="0" err="1">
+              <a:rPr lang="es-ES" sz="1200" dirty="0" err="1">
                 <a:latin typeface="Arial" panose="020B0604020202020204" pitchFamily="34" charset="0"/>
                 <a:cs typeface="Arial" panose="020B0604020202020204" pitchFamily="34" charset="0"/>
               </a:rPr>
               <a:t>eliminando</a:t>
             </a:r>
             <a:r>
-              <a:rPr lang="es-ES" sz="2000" dirty="0">
+              <a:rPr lang="es-ES" sz="1200" dirty="0">
                 <a:latin typeface="Arial" panose="020B0604020202020204" pitchFamily="34" charset="0"/>
                 <a:cs typeface="Arial" panose="020B0604020202020204" pitchFamily="34" charset="0"/>
               </a:rPr>
@@ -8641,6 +8442,7 @@
             </a:endParaRPr>
           </a:p>
           <a:p>
+            <a:pPr algn="just"/>
             <a:endParaRPr lang="es-BO" dirty="0">
               <a:latin typeface="Arial" panose="020B0604020202020204" pitchFamily="34" charset="0"/>
               <a:cs typeface="Arial" panose="020B0604020202020204" pitchFamily="34" charset="0"/>
@@ -8738,37 +8540,6 @@
           <a:chExt cx="0" cy="0"/>
         </a:xfrm>
       </p:grpSpPr>
-      <p:pic>
-        <p:nvPicPr>
-          <p:cNvPr id="9" name="Imagen 8"/>
-          <p:cNvPicPr>
-            <a:picLocks noChangeAspect="1"/>
-          </p:cNvPicPr>
-          <p:nvPr/>
-        </p:nvPicPr>
-        <p:blipFill>
-          <a:blip r:embed="rId2">
-            <a:lum bright="70000" contrast="-70000"/>
-            <a:extLst>
-              <a:ext uri="{28A0092B-C50C-407E-A947-70E740481C1C}">
-                <a14:useLocalDpi xmlns:a14="http://schemas.microsoft.com/office/drawing/2010/main" val="0"/>
-              </a:ext>
-            </a:extLst>
-          </a:blip>
-          <a:stretch>
-            <a:fillRect/>
-          </a:stretch>
-        </p:blipFill>
-        <p:spPr>
-          <a:xfrm>
-            <a:off x="3490214" y="2006348"/>
-            <a:ext cx="3786310" cy="4006096"/>
-          </a:xfrm>
-          <a:prstGeom prst="rect">
-            <a:avLst/>
-          </a:prstGeom>
-        </p:spPr>
-      </p:pic>
       <p:sp>
         <p:nvSpPr>
           <p:cNvPr id="2" name="Rectángulo 1"/>
@@ -8861,8 +8632,8 @@
         </p:nvSpPr>
         <p:spPr>
           <a:xfrm>
-            <a:off x="334850" y="1428682"/>
-            <a:ext cx="4288665" cy="588236"/>
+            <a:off x="457200" y="1280160"/>
+            <a:ext cx="11277600" cy="640080"/>
           </a:xfrm>
           <a:prstGeom prst="rect">
             <a:avLst/>
@@ -8897,7 +8668,7 @@
             </a:lvl1pPr>
           </a:lstStyle>
           <a:p>
-            <a:pPr algn="l"/>
+            <a:pPr algn="ctr"/>
             <a:r>
               <a:rPr lang="es-BO" sz="3600" u="sng" dirty="0">
                 <a:solidFill>
@@ -8918,8 +8689,8 @@
         </p:nvSpPr>
         <p:spPr>
           <a:xfrm>
-            <a:off x="437882" y="3031171"/>
-            <a:ext cx="10328856" cy="2805320"/>
+            <a:off x="548640" y="3383280"/>
+            <a:ext cx="11064240" cy="3200400"/>
           </a:xfrm>
           <a:prstGeom prst="rect">
             <a:avLst/>
@@ -8988,8 +8759,8 @@
         </p:nvSpPr>
         <p:spPr>
           <a:xfrm>
-            <a:off x="334850" y="1918034"/>
-            <a:ext cx="10431888" cy="1384995"/>
+            <a:off x="548640" y="2011680"/>
+            <a:ext cx="11064240" cy="1280160"/>
           </a:xfrm>
           <a:prstGeom prst="rect">
             <a:avLst/>
@@ -9259,8 +9030,8 @@
         </p:nvSpPr>
         <p:spPr>
           <a:xfrm>
-            <a:off x="-298536" y="2967335"/>
-            <a:ext cx="12789078" cy="2646878"/>
+            <a:off x="457200" y="2967335"/>
+            <a:ext cx="11277600" cy="2646878"/>
           </a:xfrm>
           <a:prstGeom prst="rect">
             <a:avLst/>
@@ -9409,37 +9180,6 @@
           <a:chExt cx="0" cy="0"/>
         </a:xfrm>
       </p:grpSpPr>
-      <p:pic>
-        <p:nvPicPr>
-          <p:cNvPr id="8" name="Imagen 7"/>
-          <p:cNvPicPr>
-            <a:picLocks noChangeAspect="1"/>
-          </p:cNvPicPr>
-          <p:nvPr/>
-        </p:nvPicPr>
-        <p:blipFill>
-          <a:blip r:embed="rId2">
-            <a:lum bright="70000" contrast="-70000"/>
-            <a:extLst>
-              <a:ext uri="{28A0092B-C50C-407E-A947-70E740481C1C}">
-                <a14:useLocalDpi xmlns:a14="http://schemas.microsoft.com/office/drawing/2010/main" val="0"/>
-              </a:ext>
-            </a:extLst>
-          </a:blip>
-          <a:stretch>
-            <a:fillRect/>
-          </a:stretch>
-        </p:blipFill>
-        <p:spPr>
-          <a:xfrm>
-            <a:off x="3626272" y="1888268"/>
-            <a:ext cx="3786310" cy="4006096"/>
-          </a:xfrm>
-          <a:prstGeom prst="rect">
-            <a:avLst/>
-          </a:prstGeom>
-        </p:spPr>
-      </p:pic>
       <p:sp>
         <p:nvSpPr>
           <p:cNvPr id="2" name="Rectángulo 1"/>
@@ -9532,8 +9272,8 @@
         </p:nvSpPr>
         <p:spPr>
           <a:xfrm>
-            <a:off x="0" y="1443870"/>
-            <a:ext cx="4003828" cy="588236"/>
+            <a:off x="457200" y="1280160"/>
+            <a:ext cx="11277600" cy="640080"/>
           </a:xfrm>
           <a:prstGeom prst="rect">
             <a:avLst/>
@@ -9568,7 +9308,7 @@
             </a:lvl1pPr>
           </a:lstStyle>
           <a:p>
-            <a:pPr algn="l"/>
+            <a:pPr algn="ctr"/>
             <a:r>
               <a:rPr lang="es-BO" sz="3600" u="sng" dirty="0">
                 <a:solidFill>
@@ -9589,8 +9329,8 @@
         </p:nvSpPr>
         <p:spPr>
           <a:xfrm>
-            <a:off x="2001914" y="2690987"/>
-            <a:ext cx="6496901" cy="1200329"/>
+            <a:off x="731520" y="2560320"/>
+            <a:ext cx="10698480" cy="3657600"/>
           </a:xfrm>
           <a:prstGeom prst="rect">
             <a:avLst/>
@@ -9723,37 +9463,6 @@
           <a:chExt cx="0" cy="0"/>
         </a:xfrm>
       </p:grpSpPr>
-      <p:pic>
-        <p:nvPicPr>
-          <p:cNvPr id="9" name="Imagen 8"/>
-          <p:cNvPicPr>
-            <a:picLocks noChangeAspect="1"/>
-          </p:cNvPicPr>
-          <p:nvPr/>
-        </p:nvPicPr>
-        <p:blipFill>
-          <a:blip r:embed="rId2">
-            <a:lum bright="70000" contrast="-70000"/>
-            <a:extLst>
-              <a:ext uri="{28A0092B-C50C-407E-A947-70E740481C1C}">
-                <a14:useLocalDpi xmlns:a14="http://schemas.microsoft.com/office/drawing/2010/main" val="0"/>
-              </a:ext>
-            </a:extLst>
-          </a:blip>
-          <a:stretch>
-            <a:fillRect/>
-          </a:stretch>
-        </p:blipFill>
-        <p:spPr>
-          <a:xfrm>
-            <a:off x="3626272" y="1888268"/>
-            <a:ext cx="3786310" cy="4006096"/>
-          </a:xfrm>
-          <a:prstGeom prst="rect">
-            <a:avLst/>
-          </a:prstGeom>
-        </p:spPr>
-      </p:pic>
       <p:sp>
         <p:nvSpPr>
           <p:cNvPr id="2" name="Rectángulo 1"/>
@@ -9846,8 +9555,8 @@
         </p:nvSpPr>
         <p:spPr>
           <a:xfrm>
-            <a:off x="0" y="1430992"/>
-            <a:ext cx="4829451" cy="588236"/>
+            <a:off x="457200" y="1280160"/>
+            <a:ext cx="11277600" cy="640080"/>
           </a:xfrm>
           <a:prstGeom prst="rect">
             <a:avLst/>
@@ -9882,7 +9591,7 @@
             </a:lvl1pPr>
           </a:lstStyle>
           <a:p>
-            <a:pPr algn="l"/>
+            <a:pPr algn="ctr"/>
             <a:r>
               <a:rPr lang="es-BO" sz="3600" u="sng" dirty="0">
                 <a:solidFill>
@@ -9903,8 +9612,8 @@
         </p:nvSpPr>
         <p:spPr>
           <a:xfrm>
-            <a:off x="330874" y="2347344"/>
-            <a:ext cx="10947042" cy="4062651"/>
+            <a:off x="365760" y="2194560"/>
+            <a:ext cx="11430000" cy="4389120"/>
           </a:xfrm>
           <a:prstGeom prst="rect">
             <a:avLst/>
@@ -10109,37 +9818,6 @@
           <a:chExt cx="0" cy="0"/>
         </a:xfrm>
       </p:grpSpPr>
-      <p:pic>
-        <p:nvPicPr>
-          <p:cNvPr id="10" name="Imagen 9"/>
-          <p:cNvPicPr>
-            <a:picLocks noChangeAspect="1"/>
-          </p:cNvPicPr>
-          <p:nvPr/>
-        </p:nvPicPr>
-        <p:blipFill>
-          <a:blip r:embed="rId2">
-            <a:lum bright="70000" contrast="-70000"/>
-            <a:extLst>
-              <a:ext uri="{28A0092B-C50C-407E-A947-70E740481C1C}">
-                <a14:useLocalDpi xmlns:a14="http://schemas.microsoft.com/office/drawing/2010/main" val="0"/>
-              </a:ext>
-            </a:extLst>
-          </a:blip>
-          <a:stretch>
-            <a:fillRect/>
-          </a:stretch>
-        </p:blipFill>
-        <p:spPr>
-          <a:xfrm>
-            <a:off x="3626272" y="1888268"/>
-            <a:ext cx="3786310" cy="4006096"/>
-          </a:xfrm>
-          <a:prstGeom prst="rect">
-            <a:avLst/>
-          </a:prstGeom>
-        </p:spPr>
-      </p:pic>
       <p:sp>
         <p:nvSpPr>
           <p:cNvPr id="2" name="Rectángulo 1"/>
@@ -10232,8 +9910,8 @@
         </p:nvSpPr>
         <p:spPr>
           <a:xfrm>
-            <a:off x="0" y="1347857"/>
-            <a:ext cx="6640497" cy="588236"/>
+            <a:off x="457200" y="1280160"/>
+            <a:ext cx="11277600" cy="640080"/>
           </a:xfrm>
           <a:prstGeom prst="rect">
             <a:avLst/>
@@ -10268,7 +9946,7 @@
             </a:lvl1pPr>
           </a:lstStyle>
           <a:p>
-            <a:pPr algn="l"/>
+            <a:pPr algn="ctr"/>
             <a:r>
               <a:rPr lang="es-BO" sz="3600" u="sng" dirty="0">
                 <a:solidFill>
@@ -10427,17 +10105,6 @@
                         <a:buFont typeface="Wingdings" panose="05000000000000000000" pitchFamily="2" charset="2"/>
                         <a:buChar char=""/>
                       </a:pPr>
-                      <a:r>
-                        <a:rPr lang="es-ES" sz="1800" b="0" dirty="0">
-                          <a:solidFill>
-                            <a:schemeClr val="tx1"/>
-                          </a:solidFill>
-                          <a:effectLst/>
-                          <a:latin typeface="Arial" panose="020B0604020202020204" pitchFamily="34" charset="0"/>
-                          <a:cs typeface="Arial" panose="020B0604020202020204" pitchFamily="34" charset="0"/>
-                        </a:rPr>
-                        <a:t>Gestionar ingreso al software.</a:t>
-                      </a:r>
                       <a:endParaRPr lang="es-BO" sz="1800" b="0" dirty="0">
                         <a:solidFill>
                           <a:schemeClr val="tx1"/>
@@ -10446,68 +10113,14 @@
                         <a:latin typeface="Arial" panose="020B0604020202020204" pitchFamily="34" charset="0"/>
                         <a:cs typeface="Arial" panose="020B0604020202020204" pitchFamily="34" charset="0"/>
                       </a:endParaRPr>
-                    </a:p>
-                    <a:p>
-                      <a:pPr marL="342900" lvl="0" indent="-342900" algn="just">
-                        <a:lnSpc>
-                          <a:spcPct val="150000"/>
-                        </a:lnSpc>
-                        <a:spcAft>
-                          <a:spcPts val="0"/>
-                        </a:spcAft>
-                        <a:buFont typeface="Wingdings" panose="05000000000000000000" pitchFamily="2" charset="2"/>
-                        <a:buChar char=""/>
-                      </a:pPr>
                       <a:r>
-                        <a:rPr lang="es-ES" sz="1800" b="0" dirty="0">
+                        <a:rPr lang="es-ES" sz="1600">
                           <a:solidFill>
-                            <a:schemeClr val="tx1"/>
+                            <a:srgbClr val="212121"/>
                           </a:solidFill>
-                          <a:effectLst/>
-                          <a:latin typeface="Arial" panose="020B0604020202020204" pitchFamily="34" charset="0"/>
-                          <a:cs typeface="Arial" panose="020B0604020202020204" pitchFamily="34" charset="0"/>
                         </a:rPr>
-                        <a:t>Gestionar el usuario. </a:t>
+                        <a:t>Gestionar catálogo de sectores del parque</a:t>
                       </a:r>
-                      <a:endParaRPr lang="es-BO" sz="1800" b="0" dirty="0">
-                        <a:solidFill>
-                          <a:schemeClr val="tx1"/>
-                        </a:solidFill>
-                        <a:effectLst/>
-                        <a:latin typeface="Arial" panose="020B0604020202020204" pitchFamily="34" charset="0"/>
-                        <a:cs typeface="Arial" panose="020B0604020202020204" pitchFamily="34" charset="0"/>
-                      </a:endParaRPr>
-                    </a:p>
-                    <a:p>
-                      <a:pPr marL="342900" lvl="0" indent="-342900" algn="just">
-                        <a:lnSpc>
-                          <a:spcPct val="150000"/>
-                        </a:lnSpc>
-                        <a:spcAft>
-                          <a:spcPts val="0"/>
-                        </a:spcAft>
-                        <a:buFont typeface="Wingdings" panose="05000000000000000000" pitchFamily="2" charset="2"/>
-                        <a:buChar char=""/>
-                      </a:pPr>
-                      <a:r>
-                        <a:rPr lang="es-ES" sz="1800" b="0" dirty="0">
-                          <a:solidFill>
-                            <a:schemeClr val="tx1"/>
-                          </a:solidFill>
-                          <a:effectLst/>
-                          <a:latin typeface="Arial" panose="020B0604020202020204" pitchFamily="34" charset="0"/>
-                          <a:cs typeface="Arial" panose="020B0604020202020204" pitchFamily="34" charset="0"/>
-                        </a:rPr>
-                        <a:t>Gestionar espacios e importe.</a:t>
-                      </a:r>
-                      <a:endParaRPr lang="es-BO" sz="1800" b="0" dirty="0">
-                        <a:solidFill>
-                          <a:schemeClr val="tx1"/>
-                        </a:solidFill>
-                        <a:effectLst/>
-                        <a:latin typeface="Arial" panose="020B0604020202020204" pitchFamily="34" charset="0"/>
-                        <a:cs typeface="Arial" panose="020B0604020202020204" pitchFamily="34" charset="0"/>
-                      </a:endParaRPr>
                     </a:p>
                     <a:p>
                       <a:pPr marL="342900" lvl="0" indent="-342900" algn="just">
@@ -10523,17 +10136,6 @@
                         <a:buFont typeface="Wingdings" panose="05000000000000000000" pitchFamily="2" charset="2"/>
                         <a:buChar char=""/>
                       </a:pPr>
-                      <a:r>
-                        <a:rPr lang="es-ES" sz="1800" b="0" dirty="0">
-                          <a:solidFill>
-                            <a:schemeClr val="tx1"/>
-                          </a:solidFill>
-                          <a:effectLst/>
-                          <a:latin typeface="Arial" panose="020B0604020202020204" pitchFamily="34" charset="0"/>
-                          <a:cs typeface="Arial" panose="020B0604020202020204" pitchFamily="34" charset="0"/>
-                        </a:rPr>
-                        <a:t>Gestionar registro de uso de parqueo.	</a:t>
-                      </a:r>
                       <a:endParaRPr lang="es-BO" sz="1800" b="0" dirty="0">
                         <a:solidFill>
                           <a:schemeClr val="tx1"/>
@@ -10542,37 +10144,14 @@
                         <a:latin typeface="Arial" panose="020B0604020202020204" pitchFamily="34" charset="0"/>
                         <a:cs typeface="Arial" panose="020B0604020202020204" pitchFamily="34" charset="0"/>
                       </a:endParaRPr>
-                    </a:p>
-                    <a:p>
-                      <a:pPr marL="342900" lvl="0" indent="-342900" algn="just">
-                        <a:lnSpc>
-                          <a:spcPct val="150000"/>
-                        </a:lnSpc>
-                        <a:spcAft>
-                          <a:spcPts val="0"/>
-                        </a:spcAft>
-                        <a:buFont typeface="Wingdings" panose="05000000000000000000" pitchFamily="2" charset="2"/>
-                        <a:buChar char=""/>
-                      </a:pPr>
                       <a:r>
-                        <a:rPr lang="es-ES" sz="1800" b="0" dirty="0">
+                        <a:rPr lang="es-ES" sz="1600">
                           <a:solidFill>
-                            <a:schemeClr val="tx1"/>
+                            <a:srgbClr val="212121"/>
                           </a:solidFill>
-                          <a:effectLst/>
-                          <a:latin typeface="Arial" panose="020B0604020202020204" pitchFamily="34" charset="0"/>
-                          <a:cs typeface="Arial" panose="020B0604020202020204" pitchFamily="34" charset="0"/>
                         </a:rPr>
-                        <a:t>Gestionar lista de vehículos.</a:t>
+                        <a:t>Gestionar 6 controladores BL-KR y 22 estaciones</a:t>
                       </a:r>
-                      <a:endParaRPr lang="es-BO" sz="1800" b="0" dirty="0">
-                        <a:solidFill>
-                          <a:schemeClr val="tx1"/>
-                        </a:solidFill>
-                        <a:effectLst/>
-                        <a:latin typeface="Arial" panose="020B0604020202020204" pitchFamily="34" charset="0"/>
-                        <a:cs typeface="Arial" panose="020B0604020202020204" pitchFamily="34" charset="0"/>
-                      </a:endParaRPr>
                     </a:p>
                     <a:p>
                       <a:pPr marL="342900" lvl="0" indent="-342900" algn="just">
@@ -10588,17 +10167,6 @@
                         <a:buFont typeface="Wingdings" panose="05000000000000000000" pitchFamily="2" charset="2"/>
                         <a:buChar char=""/>
                       </a:pPr>
-                      <a:r>
-                        <a:rPr lang="es-ES" sz="1800" b="0" dirty="0">
-                          <a:solidFill>
-                            <a:schemeClr val="tx1"/>
-                          </a:solidFill>
-                          <a:effectLst/>
-                          <a:latin typeface="Arial" panose="020B0604020202020204" pitchFamily="34" charset="0"/>
-                          <a:cs typeface="Arial" panose="020B0604020202020204" pitchFamily="34" charset="0"/>
-                        </a:rPr>
-                        <a:t>Gestionar emisión de  reportes.</a:t>
-                      </a:r>
                       <a:endParaRPr lang="es-BO" sz="1800" b="0" dirty="0">
                         <a:solidFill>
                           <a:schemeClr val="tx1"/>
@@ -10607,25 +10175,107 @@
                         <a:latin typeface="Arial" panose="020B0604020202020204" pitchFamily="34" charset="0"/>
                         <a:cs typeface="Arial" panose="020B0604020202020204" pitchFamily="34" charset="0"/>
                       </a:endParaRPr>
+                      <a:r>
+                        <a:rPr lang="es-ES" sz="1600">
+                          <a:solidFill>
+                            <a:srgbClr val="212121"/>
+                          </a:solidFill>
+                        </a:rPr>
+                        <a:t>Programar cronograma semanal por sector</a:t>
+                      </a:r>
                     </a:p>
                     <a:p>
-                      <a:pPr marL="457200" algn="just">
+                      <a:pPr marL="342900" lvl="0" indent="-342900" algn="just">
                         <a:lnSpc>
                           <a:spcPct val="150000"/>
                         </a:lnSpc>
+                        <a:spcBef>
+                          <a:spcPts val="1200"/>
+                        </a:spcBef>
                         <a:spcAft>
                           <a:spcPts val="0"/>
                         </a:spcAft>
+                        <a:buFont typeface="Wingdings" panose="05000000000000000000" pitchFamily="2" charset="2"/>
+                        <a:buChar char=""/>
                       </a:pPr>
-                      <a:endParaRPr lang="es-BO" sz="1200" b="0" dirty="0">
+                      <a:endParaRPr lang="es-BO" sz="1800" b="0" dirty="0">
                         <a:solidFill>
                           <a:schemeClr val="tx1"/>
                         </a:solidFill>
                         <a:effectLst/>
                         <a:latin typeface="Arial" panose="020B0604020202020204" pitchFamily="34" charset="0"/>
-                        <a:ea typeface="Arial" panose="020B0604020202020204" pitchFamily="34" charset="0"/>
                         <a:cs typeface="Arial" panose="020B0604020202020204" pitchFamily="34" charset="0"/>
                       </a:endParaRPr>
+                      <a:r>
+                        <a:rPr lang="es-ES" sz="1600">
+                          <a:solidFill>
+                            <a:srgbClr val="212121"/>
+                          </a:solidFill>
+                        </a:rPr>
+                        <a:t>Visualizar sector activo en tiempo real</a:t>
+                      </a:r>
+                    </a:p>
+                    <a:p>
+                      <a:pPr marL="342900" lvl="0" indent="-342900" algn="just">
+                        <a:lnSpc>
+                          <a:spcPct val="150000"/>
+                        </a:lnSpc>
+                        <a:spcBef>
+                          <a:spcPts val="1200"/>
+                        </a:spcBef>
+                        <a:spcAft>
+                          <a:spcPts val="0"/>
+                        </a:spcAft>
+                        <a:buFont typeface="Wingdings" panose="05000000000000000000" pitchFamily="2" charset="2"/>
+                        <a:buChar char=""/>
+                      </a:pPr>
+                      <a:endParaRPr lang="es-BO" sz="1800" b="0" dirty="0">
+                        <a:solidFill>
+                          <a:schemeClr val="tx1"/>
+                        </a:solidFill>
+                        <a:effectLst/>
+                        <a:latin typeface="Arial" panose="020B0604020202020204" pitchFamily="34" charset="0"/>
+                        <a:cs typeface="Arial" panose="020B0604020202020204" pitchFamily="34" charset="0"/>
+                      </a:endParaRPr>
+                      <a:r>
+                        <a:rPr lang="es-ES" sz="1600">
+                          <a:solidFill>
+                            <a:srgbClr val="212121"/>
+                          </a:solidFill>
+                        </a:rPr>
+                        <a:t>Generar reportes simulados (diario, semanal, mensual)</a:t>
+                      </a:r>
+                    </a:p>
+                    <a:p>
+                      <a:pPr marL="342900" lvl="0" indent="-342900" algn="just">
+                        <a:lnSpc>
+                          <a:spcPct val="150000"/>
+                        </a:lnSpc>
+                        <a:spcBef>
+                          <a:spcPts val="1200"/>
+                        </a:spcBef>
+                        <a:spcAft>
+                          <a:spcPts val="0"/>
+                        </a:spcAft>
+                        <a:buFont typeface="Wingdings" panose="05000000000000000000" pitchFamily="2" charset="2"/>
+                        <a:buChar char=""/>
+                      </a:pPr>
+                      <a:endParaRPr lang="es-BO" sz="1800" b="0" dirty="0">
+                        <a:solidFill>
+                          <a:schemeClr val="tx1"/>
+                        </a:solidFill>
+                        <a:effectLst/>
+                        <a:latin typeface="Arial" panose="020B0604020202020204" pitchFamily="34" charset="0"/>
+                        <a:cs typeface="Arial" panose="020B0604020202020204" pitchFamily="34" charset="0"/>
+                      </a:endParaRPr>
+                      <a:r>
+                        <a:rPr lang="es-ES" sz="1600">
+                          <a:solidFill>
+                            <a:srgbClr val="212121"/>
+                          </a:solidFill>
+                        </a:rPr>
+                        <a:t>Mostrar estadísticas por sector con consumo estimado</a:t>
+                      </a:r>
                     </a:p>
                   </a:txBody>
                   <a:tcPr marL="42567" marR="42567" marT="0" marB="0"/>
@@ -10648,19 +10298,19 @@
                         <a:buFont typeface="Wingdings" panose="05000000000000000000" pitchFamily="2" charset="2"/>
                         <a:buChar char=""/>
                       </a:pPr>
-                      <a:r>
-                        <a:rPr lang="es-ES" sz="1500" dirty="0">
-                          <a:effectLst/>
-                          <a:latin typeface="Arial" panose="020B0604020202020204" pitchFamily="34" charset="0"/>
-                          <a:cs typeface="Arial" panose="020B0604020202020204" pitchFamily="34" charset="0"/>
-                        </a:rPr>
-                        <a:t>Realizar un diseño de la interfaz del sistema amigable. </a:t>
-                      </a:r>
                       <a:endParaRPr lang="es-BO" sz="1500" dirty="0">
                         <a:effectLst/>
                         <a:latin typeface="Arial" panose="020B0604020202020204" pitchFamily="34" charset="0"/>
                         <a:cs typeface="Arial" panose="020B0604020202020204" pitchFamily="34" charset="0"/>
                       </a:endParaRPr>
+                      <a:r>
+                        <a:rPr lang="es-ES" sz="1600">
+                          <a:solidFill>
+                            <a:srgbClr val="212121"/>
+                          </a:solidFill>
+                        </a:rPr>
+                        <a:t>Interfaz web responsiva (PC, tablet, móvil)</a:t>
+                      </a:r>
                     </a:p>
                     <a:p>
                       <a:pPr marL="342900" lvl="0" indent="-342900" algn="just">
@@ -10676,19 +10326,19 @@
                         <a:buFont typeface="Wingdings" panose="05000000000000000000" pitchFamily="2" charset="2"/>
                         <a:buChar char=""/>
                       </a:pPr>
-                      <a:r>
-                        <a:rPr lang="es-ES" sz="1500" dirty="0">
-                          <a:effectLst/>
-                          <a:latin typeface="Arial" panose="020B0604020202020204" pitchFamily="34" charset="0"/>
-                          <a:cs typeface="Arial" panose="020B0604020202020204" pitchFamily="34" charset="0"/>
-                        </a:rPr>
-                        <a:t>Realización de un diseño de colores adecuados para las interfaces del sistema.</a:t>
-                      </a:r>
                       <a:endParaRPr lang="es-BO" sz="1500" dirty="0">
                         <a:effectLst/>
                         <a:latin typeface="Arial" panose="020B0604020202020204" pitchFamily="34" charset="0"/>
                         <a:cs typeface="Arial" panose="020B0604020202020204" pitchFamily="34" charset="0"/>
                       </a:endParaRPr>
+                      <a:r>
+                        <a:rPr lang="es-ES" sz="1600">
+                          <a:solidFill>
+                            <a:srgbClr val="212121"/>
+                          </a:solidFill>
+                        </a:rPr>
+                        <a:t>Latencia de carga menor a 3 segundos</a:t>
+                      </a:r>
                     </a:p>
                     <a:p>
                       <a:pPr marL="342900" lvl="0" indent="-342900" algn="just">
@@ -10704,35 +10354,19 @@
                         <a:buFont typeface="Wingdings" panose="05000000000000000000" pitchFamily="2" charset="2"/>
                         <a:buChar char=""/>
                       </a:pPr>
-                      <a:r>
-                        <a:rPr lang="es-ES" sz="1500" dirty="0">
-                          <a:effectLst/>
-                          <a:latin typeface="Arial" panose="020B0604020202020204" pitchFamily="34" charset="0"/>
-                          <a:cs typeface="Arial" panose="020B0604020202020204" pitchFamily="34" charset="0"/>
-                        </a:rPr>
-                        <a:t>Programar en un IDE de programación (</a:t>
-                      </a:r>
-                      <a:r>
-                        <a:rPr lang="es-ES" sz="1500" dirty="0" err="1">
-                          <a:effectLst/>
-                          <a:latin typeface="Arial" panose="020B0604020202020204" pitchFamily="34" charset="0"/>
-                          <a:cs typeface="Arial" panose="020B0604020202020204" pitchFamily="34" charset="0"/>
-                        </a:rPr>
-                        <a:t>Node</a:t>
-                      </a:r>
-                      <a:r>
-                        <a:rPr lang="es-ES" sz="1500" dirty="0">
-                          <a:effectLst/>
-                          <a:latin typeface="Arial" panose="020B0604020202020204" pitchFamily="34" charset="0"/>
-                          <a:cs typeface="Arial" panose="020B0604020202020204" pitchFamily="34" charset="0"/>
-                        </a:rPr>
-                        <a:t>-Red).</a:t>
-                      </a:r>
                       <a:endParaRPr lang="es-BO" sz="1500" dirty="0">
                         <a:effectLst/>
                         <a:latin typeface="Arial" panose="020B0604020202020204" pitchFamily="34" charset="0"/>
                         <a:cs typeface="Arial" panose="020B0604020202020204" pitchFamily="34" charset="0"/>
                       </a:endParaRPr>
+                      <a:r>
+                        <a:rPr lang="es-ES" sz="1600">
+                          <a:solidFill>
+                            <a:srgbClr val="212121"/>
+                          </a:solidFill>
+                        </a:rPr>
+                        <a:t>Stack React + TypeScript + Vite</a:t>
+                      </a:r>
                     </a:p>
                     <a:p>
                       <a:pPr marL="342900" lvl="0" indent="-342900" algn="just">
@@ -10748,35 +10382,19 @@
                         <a:buFont typeface="Wingdings" panose="05000000000000000000" pitchFamily="2" charset="2"/>
                         <a:buChar char=""/>
                       </a:pPr>
-                      <a:r>
-                        <a:rPr lang="es-ES" sz="1500" dirty="0">
-                          <a:effectLst/>
-                          <a:latin typeface="Arial" panose="020B0604020202020204" pitchFamily="34" charset="0"/>
-                          <a:cs typeface="Arial" panose="020B0604020202020204" pitchFamily="34" charset="0"/>
-                        </a:rPr>
-                        <a:t>El manejador de la base de datos (</a:t>
-                      </a:r>
-                      <a:r>
-                        <a:rPr lang="es-ES" sz="1500" dirty="0" err="1">
-                          <a:effectLst/>
-                          <a:latin typeface="Arial" panose="020B0604020202020204" pitchFamily="34" charset="0"/>
-                          <a:cs typeface="Arial" panose="020B0604020202020204" pitchFamily="34" charset="0"/>
-                        </a:rPr>
-                        <a:t>MySQL</a:t>
-                      </a:r>
-                      <a:r>
-                        <a:rPr lang="es-ES" sz="1500" dirty="0">
-                          <a:effectLst/>
-                          <a:latin typeface="Arial" panose="020B0604020202020204" pitchFamily="34" charset="0"/>
-                          <a:cs typeface="Arial" panose="020B0604020202020204" pitchFamily="34" charset="0"/>
-                        </a:rPr>
-                        <a:t>).</a:t>
-                      </a:r>
                       <a:endParaRPr lang="es-BO" sz="1500" dirty="0">
                         <a:effectLst/>
                         <a:latin typeface="Arial" panose="020B0604020202020204" pitchFamily="34" charset="0"/>
                         <a:cs typeface="Arial" panose="020B0604020202020204" pitchFamily="34" charset="0"/>
                       </a:endParaRPr>
+                      <a:r>
+                        <a:rPr lang="es-ES" sz="1600">
+                          <a:solidFill>
+                            <a:srgbClr val="212121"/>
+                          </a:solidFill>
+                        </a:rPr>
+                        <a:t>Base de datos PostgreSQL en Supabase (nube)</a:t>
+                      </a:r>
                     </a:p>
                     <a:p>
                       <a:pPr marL="342900" lvl="0" indent="-342900" algn="just">
@@ -10792,52 +10410,47 @@
                         <a:buFont typeface="Wingdings" panose="05000000000000000000" pitchFamily="2" charset="2"/>
                         <a:buChar char=""/>
                       </a:pPr>
-                      <a:r>
-                        <a:rPr lang="es-ES" sz="1500" dirty="0">
-                          <a:effectLst/>
-                          <a:latin typeface="Arial" panose="020B0604020202020204" pitchFamily="34" charset="0"/>
-                          <a:cs typeface="Arial" panose="020B0604020202020204" pitchFamily="34" charset="0"/>
-                        </a:rPr>
-                        <a:t>Opera  sobre cualquier  navegador de internet (Mozilla Firefox, Microsoft </a:t>
-                      </a:r>
-                      <a:r>
-                        <a:rPr lang="es-ES" sz="1500" dirty="0" err="1">
-                          <a:effectLst/>
-                          <a:latin typeface="Arial" panose="020B0604020202020204" pitchFamily="34" charset="0"/>
-                          <a:cs typeface="Arial" panose="020B0604020202020204" pitchFamily="34" charset="0"/>
-                        </a:rPr>
-                        <a:t>Edge</a:t>
-                      </a:r>
-                      <a:r>
-                        <a:rPr lang="es-ES" sz="1500" dirty="0">
-                          <a:effectLst/>
-                          <a:latin typeface="Arial" panose="020B0604020202020204" pitchFamily="34" charset="0"/>
-                          <a:cs typeface="Arial" panose="020B0604020202020204" pitchFamily="34" charset="0"/>
-                        </a:rPr>
-                        <a:t>, Opera, </a:t>
-                      </a:r>
-                      <a:r>
-                        <a:rPr lang="es-ES" sz="1500" dirty="0" err="1">
-                          <a:effectLst/>
-                          <a:latin typeface="Arial" panose="020B0604020202020204" pitchFamily="34" charset="0"/>
-                          <a:cs typeface="Arial" panose="020B0604020202020204" pitchFamily="34" charset="0"/>
-                        </a:rPr>
-                        <a:t>chrome</a:t>
-                      </a:r>
-                      <a:r>
-                        <a:rPr lang="es-ES" sz="1500" dirty="0">
-                          <a:effectLst/>
-                          <a:latin typeface="Arial" panose="020B0604020202020204" pitchFamily="34" charset="0"/>
-                          <a:cs typeface="Arial" panose="020B0604020202020204" pitchFamily="34" charset="0"/>
-                        </a:rPr>
-                        <a:t>).</a:t>
-                      </a:r>
                       <a:endParaRPr lang="es-BO" sz="1500" dirty="0">
                         <a:effectLst/>
                         <a:latin typeface="Arial" panose="020B0604020202020204" pitchFamily="34" charset="0"/>
-                        <a:ea typeface="Arial" panose="020B0604020202020204" pitchFamily="34" charset="0"/>
                         <a:cs typeface="Arial" panose="020B0604020202020204" pitchFamily="34" charset="0"/>
                       </a:endParaRPr>
+                      <a:r>
+                        <a:rPr lang="es-ES" sz="1600">
+                          <a:solidFill>
+                            <a:srgbClr val="212121"/>
+                          </a:solidFill>
+                        </a:rPr>
+                        <a:t>Cumplimiento de la Norma Boliviana NB 777</a:t>
+                      </a:r>
+                    </a:p>
+                    <a:p>
+                      <a:pPr marL="342900" lvl="0" indent="-342900" algn="just">
+                        <a:lnSpc>
+                          <a:spcPct val="150000"/>
+                        </a:lnSpc>
+                        <a:spcBef>
+                          <a:spcPts val="1200"/>
+                        </a:spcBef>
+                        <a:spcAft>
+                          <a:spcPts val="0"/>
+                        </a:spcAft>
+                        <a:buFont typeface="Wingdings" panose="05000000000000000000" pitchFamily="2" charset="2"/>
+                        <a:buChar char=""/>
+                      </a:pPr>
+                      <a:endParaRPr lang="es-BO" sz="1500" dirty="0">
+                        <a:effectLst/>
+                        <a:latin typeface="Arial" panose="020B0604020202020204" pitchFamily="34" charset="0"/>
+                        <a:cs typeface="Arial" panose="020B0604020202020204" pitchFamily="34" charset="0"/>
+                      </a:endParaRPr>
+                      <a:r>
+                        <a:rPr lang="es-ES" sz="1600">
+                          <a:solidFill>
+                            <a:srgbClr val="212121"/>
+                          </a:solidFill>
+                        </a:rPr>
+                        <a:t>Cable 20 AWG sin caída de tensión hasta 30 metros</a:t>
+                      </a:r>
                     </a:p>
                   </a:txBody>
                   <a:tcPr marL="42567" marR="42567" marT="0" marB="0"/>
@@ -10942,37 +10555,6 @@
           <a:chExt cx="0" cy="0"/>
         </a:xfrm>
       </p:grpSpPr>
-      <p:pic>
-        <p:nvPicPr>
-          <p:cNvPr id="10" name="Imagen 9"/>
-          <p:cNvPicPr>
-            <a:picLocks noChangeAspect="1"/>
-          </p:cNvPicPr>
-          <p:nvPr/>
-        </p:nvPicPr>
-        <p:blipFill>
-          <a:blip r:embed="rId2">
-            <a:lum bright="70000" contrast="-70000"/>
-            <a:extLst>
-              <a:ext uri="{28A0092B-C50C-407E-A947-70E740481C1C}">
-                <a14:useLocalDpi xmlns:a14="http://schemas.microsoft.com/office/drawing/2010/main" val="0"/>
-              </a:ext>
-            </a:extLst>
-          </a:blip>
-          <a:stretch>
-            <a:fillRect/>
-          </a:stretch>
-        </p:blipFill>
-        <p:spPr>
-          <a:xfrm>
-            <a:off x="3572483" y="1936093"/>
-            <a:ext cx="3786310" cy="4006096"/>
-          </a:xfrm>
-          <a:prstGeom prst="rect">
-            <a:avLst/>
-          </a:prstGeom>
-        </p:spPr>
-      </p:pic>
       <p:sp>
         <p:nvSpPr>
           <p:cNvPr id="2" name="Rectángulo 1"/>
@@ -11065,8 +10647,8 @@
         </p:nvSpPr>
         <p:spPr>
           <a:xfrm>
-            <a:off x="0" y="1347857"/>
-            <a:ext cx="5123329" cy="588236"/>
+            <a:off x="457200" y="1280160"/>
+            <a:ext cx="11277600" cy="640080"/>
           </a:xfrm>
           <a:prstGeom prst="rect">
             <a:avLst/>
@@ -11101,7 +10683,7 @@
             </a:lvl1pPr>
           </a:lstStyle>
           <a:p>
-            <a:pPr algn="l"/>
+            <a:pPr algn="ctr"/>
             <a:r>
               <a:rPr lang="es-BO" sz="3600" u="sng" dirty="0">
                 <a:solidFill>
@@ -11182,8 +10764,8 @@
         </p:nvSpPr>
         <p:spPr>
           <a:xfrm>
-            <a:off x="919514" y="2083620"/>
-            <a:ext cx="9515404" cy="4317179"/>
+            <a:off x="548640" y="2194560"/>
+            <a:ext cx="11064240" cy="4389120"/>
           </a:xfrm>
           <a:prstGeom prst="rect">
             <a:avLst/>
@@ -11286,37 +10868,6 @@
           <a:chExt cx="0" cy="0"/>
         </a:xfrm>
       </p:grpSpPr>
-      <p:pic>
-        <p:nvPicPr>
-          <p:cNvPr id="10" name="Imagen 9"/>
-          <p:cNvPicPr>
-            <a:picLocks noChangeAspect="1"/>
-          </p:cNvPicPr>
-          <p:nvPr/>
-        </p:nvPicPr>
-        <p:blipFill>
-          <a:blip r:embed="rId2">
-            <a:lum bright="70000" contrast="-70000"/>
-            <a:extLst>
-              <a:ext uri="{28A0092B-C50C-407E-A947-70E740481C1C}">
-                <a14:useLocalDpi xmlns:a14="http://schemas.microsoft.com/office/drawing/2010/main" val="0"/>
-              </a:ext>
-            </a:extLst>
-          </a:blip>
-          <a:stretch>
-            <a:fillRect/>
-          </a:stretch>
-        </p:blipFill>
-        <p:spPr>
-          <a:xfrm>
-            <a:off x="3626272" y="1888268"/>
-            <a:ext cx="3786310" cy="4006096"/>
-          </a:xfrm>
-          <a:prstGeom prst="rect">
-            <a:avLst/>
-          </a:prstGeom>
-        </p:spPr>
-      </p:pic>
       <p:sp>
         <p:nvSpPr>
           <p:cNvPr id="2" name="Rectángulo 1"/>
@@ -11409,8 +10960,8 @@
         </p:nvSpPr>
         <p:spPr>
           <a:xfrm>
-            <a:off x="304799" y="1442323"/>
-            <a:ext cx="9103659" cy="588236"/>
+            <a:off x="457200" y="1280160"/>
+            <a:ext cx="11277600" cy="640080"/>
           </a:xfrm>
           <a:prstGeom prst="rect">
             <a:avLst/>
@@ -11445,7 +10996,7 @@
             </a:lvl1pPr>
           </a:lstStyle>
           <a:p>
-            <a:pPr algn="l"/>
+            <a:pPr algn="ctr"/>
             <a:r>
               <a:rPr lang="es-BO" sz="3600" u="sng" dirty="0">
                 <a:solidFill>
@@ -11526,8 +11077,8 @@
         </p:nvSpPr>
         <p:spPr>
           <a:xfrm>
-            <a:off x="645460" y="2272553"/>
-            <a:ext cx="9676176" cy="2909047"/>
+            <a:off x="548640" y="2286000"/>
+            <a:ext cx="11064240" cy="4114800"/>
           </a:xfrm>
           <a:prstGeom prst="rect">
             <a:avLst/>
@@ -11616,37 +11167,6 @@
           <a:chExt cx="0" cy="0"/>
         </a:xfrm>
       </p:grpSpPr>
-      <p:pic>
-        <p:nvPicPr>
-          <p:cNvPr id="13" name="Imagen 12"/>
-          <p:cNvPicPr>
-            <a:picLocks noChangeAspect="1"/>
-          </p:cNvPicPr>
-          <p:nvPr/>
-        </p:nvPicPr>
-        <p:blipFill>
-          <a:blip r:embed="rId2">
-            <a:lum bright="70000" contrast="-70000"/>
-            <a:extLst>
-              <a:ext uri="{28A0092B-C50C-407E-A947-70E740481C1C}">
-                <a14:useLocalDpi xmlns:a14="http://schemas.microsoft.com/office/drawing/2010/main" val="0"/>
-              </a:ext>
-            </a:extLst>
-          </a:blip>
-          <a:stretch>
-            <a:fillRect/>
-          </a:stretch>
-        </p:blipFill>
-        <p:spPr>
-          <a:xfrm>
-            <a:off x="3626272" y="1788565"/>
-            <a:ext cx="3786310" cy="4006096"/>
-          </a:xfrm>
-          <a:prstGeom prst="rect">
-            <a:avLst/>
-          </a:prstGeom>
-        </p:spPr>
-      </p:pic>
       <p:sp>
         <p:nvSpPr>
           <p:cNvPr id="2" name="Rectángulo 1"/>
@@ -11739,8 +11259,8 @@
         </p:nvSpPr>
         <p:spPr>
           <a:xfrm>
-            <a:off x="109470" y="1200329"/>
-            <a:ext cx="5267459" cy="588236"/>
+            <a:off x="457200" y="1280160"/>
+            <a:ext cx="11277600" cy="640080"/>
           </a:xfrm>
           <a:prstGeom prst="rect">
             <a:avLst/>
@@ -11775,7 +11295,7 @@
             </a:lvl1pPr>
           </a:lstStyle>
           <a:p>
-            <a:pPr algn="l"/>
+            <a:pPr algn="ctr"/>
             <a:r>
               <a:rPr lang="es-BO" sz="3600" u="sng" dirty="0">
                 <a:solidFill>
@@ -11796,8 +11316,8 @@
         </p:nvSpPr>
         <p:spPr>
           <a:xfrm>
-            <a:off x="283335" y="1788565"/>
-            <a:ext cx="11908665" cy="923330"/>
+            <a:off x="548640" y="2103120"/>
+            <a:ext cx="11064240" cy="1828800"/>
           </a:xfrm>
           <a:prstGeom prst="rect">
             <a:avLst/>
@@ -11810,8 +11330,9 @@
           </a:bodyPr>
           <a:lstStyle/>
           <a:p>
-            <a:r>
-              <a:rPr lang="es-MX" dirty="0">
+            <a:pPr algn="just"/>
+            <a:r>
+              <a:rPr lang="es-MX" dirty="0" sz="1300">
                 <a:latin typeface="Arial" panose="020B0604020202020204" pitchFamily="34" charset="0"/>
                 <a:cs typeface="Arial" panose="020B0604020202020204" pitchFamily="34" charset="0"/>
               </a:rPr>
@@ -11896,8 +11417,8 @@
           </p:nvPr>
         </p:nvGraphicFramePr>
         <p:xfrm>
-          <a:off x="3231725" y="2711895"/>
-          <a:ext cx="7299924" cy="3863486"/>
+          <a:off x="2286000" y="4114800"/>
+          <a:ext cx="7589520" cy="2468880"/>
         </p:xfrm>
         <a:graphic>
           <a:graphicData uri="http://schemas.openxmlformats.org/drawingml/2006/table">
@@ -11972,7 +11493,7 @@
                           <a:latin typeface="Arial" panose="020B0604020202020204" pitchFamily="34" charset="0"/>
                           <a:cs typeface="Arial" panose="020B0604020202020204" pitchFamily="34" charset="0"/>
                         </a:rPr>
-                        <a:t>Administrador </a:t>
+                        <a:t>Administrador (Propietaria)</a:t>
                       </a:r>
                       <a:endParaRPr lang="es-BO" sz="1200" dirty="0">
                         <a:effectLst/>
@@ -12041,7 +11562,7 @@
                           <a:latin typeface="Arial" panose="020B0604020202020204" pitchFamily="34" charset="0"/>
                           <a:cs typeface="Arial" panose="020B0604020202020204" pitchFamily="34" charset="0"/>
                         </a:rPr>
-                        <a:t>Gestionar ingreso al software.</a:t>
+                        <a:t>Gestionar catálogo de sectores</a:t>
                       </a:r>
                       <a:endParaRPr lang="es-BO" sz="1400" dirty="0">
                         <a:effectLst/>
@@ -12087,7 +11608,7 @@
                           <a:latin typeface="Arial" panose="020B0604020202020204" pitchFamily="34" charset="0"/>
                           <a:cs typeface="Arial" panose="020B0604020202020204" pitchFamily="34" charset="0"/>
                         </a:rPr>
-                        <a:t>Gestionar el usuario. </a:t>
+                        <a:t>Gestionar 6 controladores BL-KR</a:t>
                       </a:r>
                       <a:endParaRPr lang="es-BO" sz="1400" dirty="0">
                         <a:effectLst/>
@@ -12133,7 +11654,7 @@
                           <a:latin typeface="Arial" panose="020B0604020202020204" pitchFamily="34" charset="0"/>
                           <a:cs typeface="Arial" panose="020B0604020202020204" pitchFamily="34" charset="0"/>
                         </a:rPr>
-                        <a:t>Gestionar espacios e importe.</a:t>
+                        <a:t>Definir cronograma semanal</a:t>
                       </a:r>
                       <a:endParaRPr lang="es-BO" sz="1400" dirty="0">
                         <a:effectLst/>
@@ -12179,7 +11700,7 @@
                           <a:latin typeface="Arial" panose="020B0604020202020204" pitchFamily="34" charset="0"/>
                           <a:cs typeface="Arial" panose="020B0604020202020204" pitchFamily="34" charset="0"/>
                         </a:rPr>
-                        <a:t>Gestionar registro de uso de parqueo.</a:t>
+                        <a:t>Visualizar sector activo en tiempo real</a:t>
                       </a:r>
                       <a:endParaRPr lang="es-BO" sz="1400" dirty="0">
                         <a:effectLst/>
@@ -12228,7 +11749,7 @@
                           <a:latin typeface="Arial" panose="020B0604020202020204" pitchFamily="34" charset="0"/>
                           <a:cs typeface="Arial" panose="020B0604020202020204" pitchFamily="34" charset="0"/>
                         </a:rPr>
-                        <a:t>Gestionar lista de vehículos.</a:t>
+                        <a:t>Consultar reportes simulados</a:t>
                       </a:r>
                       <a:endParaRPr lang="es-BO" sz="1400" dirty="0">
                         <a:effectLst/>
@@ -12274,7 +11795,7 @@
                           <a:latin typeface="Arial" panose="020B0604020202020204" pitchFamily="34" charset="0"/>
                           <a:cs typeface="Arial" panose="020B0604020202020204" pitchFamily="34" charset="0"/>
                         </a:rPr>
-                        <a:t>Gestionar emisión de reportes.</a:t>
+                        <a:t>Programar BL-KR vía app K-RainBL</a:t>
                       </a:r>
                       <a:endParaRPr lang="es-BO" sz="1400" dirty="0">
                         <a:effectLst/>
@@ -12412,7 +11933,7 @@
                           <a:latin typeface="Arial" panose="020B0604020202020204" pitchFamily="34" charset="0"/>
                           <a:cs typeface="Arial" panose="020B0604020202020204" pitchFamily="34" charset="0"/>
                         </a:rPr>
-                        <a:t>Es un actor primario y representa la persona que dirige el </a:t>
+                        <a:t>Actor primario. Es la propietaria del parque</a:t>
                       </a:r>
                       <a:endParaRPr lang="es-BO" sz="1400" dirty="0">
                         <a:effectLst/>
@@ -12435,7 +11956,7 @@
                           <a:latin typeface="Arial" panose="020B0604020202020204" pitchFamily="34" charset="0"/>
                           <a:cs typeface="Arial" panose="020B0604020202020204" pitchFamily="34" charset="0"/>
                         </a:rPr>
-                        <a:t>Sistema.</a:t>
+                        <a:t>que dirige y administra el sistema completo.</a:t>
                       </a:r>
                       <a:endParaRPr lang="es-BO" sz="1400" dirty="0">
                         <a:effectLst/>
@@ -12457,36 +11978,6 @@
           </a:graphicData>
         </a:graphic>
       </p:graphicFrame>
-      <p:pic>
-        <p:nvPicPr>
-          <p:cNvPr id="18" name="Imagen 17" descr="Recorte de pantalla"/>
-          <p:cNvPicPr>
-            <a:picLocks noChangeAspect="1"/>
-          </p:cNvPicPr>
-          <p:nvPr/>
-        </p:nvPicPr>
-        <p:blipFill>
-          <a:blip r:embed="rId5">
-            <a:extLst>
-              <a:ext uri="{28A0092B-C50C-407E-A947-70E740481C1C}">
-                <a14:useLocalDpi xmlns:a14="http://schemas.microsoft.com/office/drawing/2010/main" val="0"/>
-              </a:ext>
-            </a:extLst>
-          </a:blip>
-          <a:stretch>
-            <a:fillRect/>
-          </a:stretch>
-        </p:blipFill>
-        <p:spPr>
-          <a:xfrm>
-            <a:off x="866625" y="2711895"/>
-            <a:ext cx="1781810" cy="3512712"/>
-          </a:xfrm>
-          <a:prstGeom prst="rect">
-            <a:avLst/>
-          </a:prstGeom>
-        </p:spPr>
-      </p:pic>
     </p:spTree>
     <p:extLst>
       <p:ext uri="{BB962C8B-B14F-4D97-AF65-F5344CB8AC3E}">
@@ -12517,37 +12008,6 @@
           <a:chExt cx="0" cy="0"/>
         </a:xfrm>
       </p:grpSpPr>
-      <p:pic>
-        <p:nvPicPr>
-          <p:cNvPr id="13" name="Imagen 12"/>
-          <p:cNvPicPr>
-            <a:picLocks noChangeAspect="1"/>
-          </p:cNvPicPr>
-          <p:nvPr/>
-        </p:nvPicPr>
-        <p:blipFill>
-          <a:blip r:embed="rId2">
-            <a:lum bright="70000" contrast="-70000"/>
-            <a:extLst>
-              <a:ext uri="{28A0092B-C50C-407E-A947-70E740481C1C}">
-                <a14:useLocalDpi xmlns:a14="http://schemas.microsoft.com/office/drawing/2010/main" val="0"/>
-              </a:ext>
-            </a:extLst>
-          </a:blip>
-          <a:stretch>
-            <a:fillRect/>
-          </a:stretch>
-        </p:blipFill>
-        <p:spPr>
-          <a:xfrm>
-            <a:off x="3626272" y="1788565"/>
-            <a:ext cx="3786310" cy="4006096"/>
-          </a:xfrm>
-          <a:prstGeom prst="rect">
-            <a:avLst/>
-          </a:prstGeom>
-        </p:spPr>
-      </p:pic>
       <p:sp>
         <p:nvSpPr>
           <p:cNvPr id="2" name="Rectángulo 1"/>
@@ -12640,8 +12100,8 @@
         </p:nvSpPr>
         <p:spPr>
           <a:xfrm>
-            <a:off x="109470" y="1200329"/>
-            <a:ext cx="5267459" cy="588236"/>
+            <a:off x="457200" y="1280160"/>
+            <a:ext cx="11277600" cy="640080"/>
           </a:xfrm>
           <a:prstGeom prst="rect">
             <a:avLst/>
@@ -12676,7 +12136,7 @@
             </a:lvl1pPr>
           </a:lstStyle>
           <a:p>
-            <a:pPr algn="l"/>
+            <a:pPr algn="ctr"/>
             <a:r>
               <a:rPr lang="es-BO" sz="3600" u="sng" dirty="0">
                 <a:solidFill>
@@ -12697,8 +12157,8 @@
         </p:nvSpPr>
         <p:spPr>
           <a:xfrm>
-            <a:off x="283336" y="1788565"/>
-            <a:ext cx="11240794" cy="369332"/>
+            <a:off x="548640" y="2103120"/>
+            <a:ext cx="11064240" cy="1828800"/>
           </a:xfrm>
           <a:prstGeom prst="rect">
             <a:avLst/>
@@ -12711,8 +12171,9 @@
           </a:bodyPr>
           <a:lstStyle/>
           <a:p>
-            <a:r>
-              <a:rPr lang="es-MX" dirty="0">
+            <a:pPr algn="just"/>
+            <a:r>
+              <a:rPr lang="es-MX" dirty="0" sz="1300">
                 <a:latin typeface="Arial" panose="020B0604020202020204" pitchFamily="34" charset="0"/>
                 <a:cs typeface="Arial" panose="020B0604020202020204" pitchFamily="34" charset="0"/>
               </a:rPr>
@@ -12797,8 +12258,8 @@
           </p:nvPr>
         </p:nvGraphicFramePr>
         <p:xfrm>
-          <a:off x="3186582" y="2819469"/>
-          <a:ext cx="7567277" cy="3082768"/>
+          <a:off x="2286000" y="4114800"/>
+          <a:ext cx="7589520" cy="2468880"/>
         </p:xfrm>
         <a:graphic>
           <a:graphicData uri="http://schemas.openxmlformats.org/drawingml/2006/table">
@@ -12873,7 +12334,7 @@
                           <a:latin typeface="Arial" panose="020B0604020202020204" pitchFamily="34" charset="0"/>
                           <a:cs typeface="Arial" panose="020B0604020202020204" pitchFamily="34" charset="0"/>
                         </a:rPr>
-                        <a:t>Empleado Encargado</a:t>
+                        <a:t>Operador (Jardinero)</a:t>
                       </a:r>
                       <a:endParaRPr lang="es-BO" sz="1800" dirty="0">
                         <a:effectLst/>
@@ -12965,7 +12426,7 @@
                           <a:latin typeface="Arial" panose="020B0604020202020204" pitchFamily="34" charset="0"/>
                           <a:cs typeface="Arial" panose="020B0604020202020204" pitchFamily="34" charset="0"/>
                         </a:rPr>
-                        <a:t>Gestionar registro de uso de parqueo.</a:t>
+                        <a:t>Consultar cronograma semanal</a:t>
                       </a:r>
                       <a:endParaRPr lang="es-BO" sz="1800" dirty="0">
                         <a:effectLst/>
@@ -13014,7 +12475,7 @@
                           <a:latin typeface="Arial" panose="020B0604020202020204" pitchFamily="34" charset="0"/>
                           <a:cs typeface="Arial" panose="020B0604020202020204" pitchFamily="34" charset="0"/>
                         </a:rPr>
-                        <a:t>Gestionar lista de vehículos.</a:t>
+                        <a:t>Visualizar sector activo y reportes</a:t>
                       </a:r>
                       <a:endParaRPr lang="es-BO" sz="1800" dirty="0">
                         <a:effectLst/>
@@ -13106,7 +12567,7 @@
                           <a:latin typeface="Arial" panose="020B0604020202020204" pitchFamily="34" charset="0"/>
                           <a:cs typeface="Arial" panose="020B0604020202020204" pitchFamily="34" charset="0"/>
                         </a:rPr>
-                        <a:t>Primario </a:t>
+                        <a:t>Primario</a:t>
                       </a:r>
                       <a:endParaRPr lang="es-BO" sz="1800">
                         <a:effectLst/>
@@ -13190,7 +12651,7 @@
                           <a:latin typeface="Arial" panose="020B0604020202020204" pitchFamily="34" charset="0"/>
                           <a:cs typeface="Arial" panose="020B0604020202020204" pitchFamily="34" charset="0"/>
                         </a:rPr>
-                        <a:t>Es un actor que tiene acceso limitado al sistema</a:t>
+                        <a:t>Actor con acceso de solo lectura. Tiene rol operativo en el parque.</a:t>
                       </a:r>
                       <a:endParaRPr lang="es-BO" sz="1800" dirty="0">
                         <a:effectLst/>
@@ -13212,36 +12673,6 @@
           </a:graphicData>
         </a:graphic>
       </p:graphicFrame>
-      <p:pic>
-        <p:nvPicPr>
-          <p:cNvPr id="14" name="Imagen 13" descr="Recorte de pantalla"/>
-          <p:cNvPicPr>
-            <a:picLocks noChangeAspect="1"/>
-          </p:cNvPicPr>
-          <p:nvPr/>
-        </p:nvPicPr>
-        <p:blipFill>
-          <a:blip r:embed="rId5">
-            <a:extLst>
-              <a:ext uri="{28A0092B-C50C-407E-A947-70E740481C1C}">
-                <a14:useLocalDpi xmlns:a14="http://schemas.microsoft.com/office/drawing/2010/main" val="0"/>
-              </a:ext>
-            </a:extLst>
-          </a:blip>
-          <a:stretch>
-            <a:fillRect/>
-          </a:stretch>
-        </p:blipFill>
-        <p:spPr>
-          <a:xfrm>
-            <a:off x="735985" y="2376801"/>
-            <a:ext cx="2034109" cy="3586060"/>
-          </a:xfrm>
-          <a:prstGeom prst="rect">
-            <a:avLst/>
-          </a:prstGeom>
-        </p:spPr>
-      </p:pic>
     </p:spTree>
     <p:extLst>
       <p:ext uri="{BB962C8B-B14F-4D97-AF65-F5344CB8AC3E}">
